--- a/courses/ooad/sessions/references.pptx
+++ b/courses/ooad/sessions/references.pptx
@@ -2361,7 +2361,7 @@
                 <a:latin typeface="맑은 고딕"/>
                 <a:ea typeface="맑은 고딕"/>
               </a:rPr>
-              <a:t>  Object-Oriented Analysis and Design with Applications, 2nd ed., Grady Booch, Benjamin/Cummings, 1994</a:t>
+              <a:t>  Object-Oriented Analysis and Design with Applications, 2nd ed., Grady Booch, 1994</a:t>
             </a:r>
           </a:p>
           <a:p>
@@ -2627,7 +2627,7 @@
                 <a:latin typeface="맑은 고딕"/>
                 <a:ea typeface="맑은 고딕"/>
               </a:rPr>
-              <a:t>  Behaviour-Driven Development, Cucumber documentation, https://cucumber.io/docs/bdd/</a:t>
+              <a:t>  Behaviour-Driven Development, Cucumber documentation</a:t>
             </a:r>
           </a:p>
           <a:p>
@@ -2912,17 +2912,17 @@
                 <a:latin typeface="맑은 고딕"/>
                 <a:ea typeface="맑은 고딕"/>
               </a:rPr>
-              <a:t>[Fowler 2003a]</a:t>
-            </a:r>
-            <a:r>
-              <a:rPr sz="800" b="0">
-                <a:solidFill>
-                  <a:srgbClr val="000000"/>
-                </a:solidFill>
-                <a:latin typeface="맑은 고딕"/>
-                <a:ea typeface="맑은 고딕"/>
-              </a:rPr>
-              <a:t>  AggregationAndComposition, Martin Fowler, martinfowler.com, 2003, https://martinfowler.com/bliki/AggregationAndComposition.html</a:t>
+              <a:t>[Fowler 2003b]</a:t>
+            </a:r>
+            <a:r>
+              <a:rPr sz="800" b="0">
+                <a:solidFill>
+                  <a:srgbClr val="000000"/>
+                </a:solidFill>
+                <a:latin typeface="맑은 고딕"/>
+                <a:ea typeface="맑은 고딕"/>
+              </a:rPr>
+              <a:t>  AnemicDomainModel, Martin Fowler, martinfowler.com, 2003, https://martinfowler.com/bliki/AnemicDomainModel.html</a:t>
             </a:r>
           </a:p>
           <a:p>
@@ -2953,17 +2953,37 @@
                 <a:latin typeface="맑은 고딕"/>
                 <a:ea typeface="맑은 고딕"/>
               </a:rPr>
-              <a:t>[Fowler 2003b]</a:t>
-            </a:r>
-            <a:r>
-              <a:rPr sz="800" b="0">
-                <a:solidFill>
-                  <a:srgbClr val="000000"/>
-                </a:solidFill>
-                <a:latin typeface="맑은 고딕"/>
-                <a:ea typeface="맑은 고딕"/>
-              </a:rPr>
-              <a:t>  AnemicDomainModel, Martin Fowler, martinfowler.com, 2003, https://martinfowler.com/bliki/AnemicDomainModel.html</a:t>
+              <a:t>[Fowler 2003c]</a:t>
+            </a:r>
+            <a:r>
+              <a:rPr sz="800" b="0">
+                <a:solidFill>
+                  <a:srgbClr val="000000"/>
+                </a:solidFill>
+                <a:latin typeface="맑은 고딕"/>
+                <a:ea typeface="맑은 고딕"/>
+              </a:rPr>
+              <a:t>  Who Needs an Architect?, Martin Fowler, IEEE Software 20</a:t>
+            </a:r>
+            <a:r>
+              <a:rPr sz="800" b="0">
+                <a:solidFill>
+                  <a:srgbClr val="000000"/>
+                </a:solidFill>
+                <a:latin typeface="맑은 고딕"/>
+                <a:ea typeface="맑은 고딕"/>
+              </a:rPr>
+              <a:t>(5)</a:t>
+            </a:r>
+            <a:r>
+              <a:rPr sz="800" b="0">
+                <a:solidFill>
+                  <a:srgbClr val="000000"/>
+                </a:solidFill>
+                <a:latin typeface="맑은 고딕"/>
+                <a:ea typeface="맑은 고딕"/>
+              </a:rPr>
+              <a:t>, 2003</a:t>
             </a:r>
           </a:p>
           <a:p>
@@ -2994,37 +3014,17 @@
                 <a:latin typeface="맑은 고딕"/>
                 <a:ea typeface="맑은 고딕"/>
               </a:rPr>
-              <a:t>[Fowler 2003c]</a:t>
-            </a:r>
-            <a:r>
-              <a:rPr sz="800" b="0">
-                <a:solidFill>
-                  <a:srgbClr val="000000"/>
-                </a:solidFill>
-                <a:latin typeface="맑은 고딕"/>
-                <a:ea typeface="맑은 고딕"/>
-              </a:rPr>
-              <a:t>  Who Needs an Architect?, Martin Fowler, IEEE Software 20</a:t>
-            </a:r>
-            <a:r>
-              <a:rPr sz="800" b="0">
-                <a:solidFill>
-                  <a:srgbClr val="000000"/>
-                </a:solidFill>
-                <a:latin typeface="맑은 고딕"/>
-                <a:ea typeface="맑은 고딕"/>
-              </a:rPr>
-              <a:t>(5)</a:t>
-            </a:r>
-            <a:r>
-              <a:rPr sz="800" b="0">
-                <a:solidFill>
-                  <a:srgbClr val="000000"/>
-                </a:solidFill>
-                <a:latin typeface="맑은 고딕"/>
-                <a:ea typeface="맑은 고딕"/>
-              </a:rPr>
-              <a:t>, 2003</a:t>
+              <a:t>[Fowler 2004]</a:t>
+            </a:r>
+            <a:r>
+              <a:rPr sz="800" b="0">
+                <a:solidFill>
+                  <a:srgbClr val="000000"/>
+                </a:solidFill>
+                <a:latin typeface="맑은 고딕"/>
+                <a:ea typeface="맑은 고딕"/>
+              </a:rPr>
+              <a:t>  UML Distilled, 3rd ed., Martin Fowler, Addison-Wesley, 2004</a:t>
             </a:r>
           </a:p>
           <a:p>
@@ -3055,17 +3055,17 @@
                 <a:latin typeface="맑은 고딕"/>
                 <a:ea typeface="맑은 고딕"/>
               </a:rPr>
-              <a:t>[Fowler 2004]</a:t>
-            </a:r>
-            <a:r>
-              <a:rPr sz="800" b="0">
-                <a:solidFill>
-                  <a:srgbClr val="000000"/>
-                </a:solidFill>
-                <a:latin typeface="맑은 고딕"/>
-                <a:ea typeface="맑은 고딕"/>
-              </a:rPr>
-              <a:t>  UML Distilled, 3rd ed., Martin Fowler, Addison-Wesley, 2004</a:t>
+              <a:t>[Fowler 2011]</a:t>
+            </a:r>
+            <a:r>
+              <a:rPr sz="800" b="0">
+                <a:solidFill>
+                  <a:srgbClr val="000000"/>
+                </a:solidFill>
+                <a:latin typeface="맑은 고딕"/>
+                <a:ea typeface="맑은 고딕"/>
+              </a:rPr>
+              <a:t>  FrequencyReducesDifficulty, Martin Fowler, martinfowler.com, 2011, https://martinfowler.com/bliki/FrequencyReducesDifficulty.html</a:t>
             </a:r>
           </a:p>
           <a:p>
@@ -3096,17 +3096,17 @@
                 <a:latin typeface="맑은 고딕"/>
                 <a:ea typeface="맑은 고딕"/>
               </a:rPr>
-              <a:t>[Fowler 2011]</a:t>
-            </a:r>
-            <a:r>
-              <a:rPr sz="800" b="0">
-                <a:solidFill>
-                  <a:srgbClr val="000000"/>
-                </a:solidFill>
-                <a:latin typeface="맑은 고딕"/>
-                <a:ea typeface="맑은 고딕"/>
-              </a:rPr>
-              <a:t>  FrequencyReducesDifficulty, Martin Fowler, martinfowler.com, 2011, https://martinfowler.com/bliki/FrequencyReducesDifficulty.html</a:t>
+              <a:t>[Fowler 2014]</a:t>
+            </a:r>
+            <a:r>
+              <a:rPr sz="800" b="0">
+                <a:solidFill>
+                  <a:srgbClr val="000000"/>
+                </a:solidFill>
+                <a:latin typeface="맑은 고딕"/>
+                <a:ea typeface="맑은 고딕"/>
+              </a:rPr>
+              <a:t>  Microservices and the First Law of Distributed Objects, Martin Fowler, martinfowler.com, 2014, https://martinfowler.com/articles/distributed-objects-microservices.html</a:t>
             </a:r>
           </a:p>
           <a:p>
@@ -3137,17 +3137,17 @@
                 <a:latin typeface="맑은 고딕"/>
                 <a:ea typeface="맑은 고딕"/>
               </a:rPr>
-              <a:t>[Fowler 2014]</a:t>
-            </a:r>
-            <a:r>
-              <a:rPr sz="800" b="0">
-                <a:solidFill>
-                  <a:srgbClr val="000000"/>
-                </a:solidFill>
-                <a:latin typeface="맑은 고딕"/>
-                <a:ea typeface="맑은 고딕"/>
-              </a:rPr>
-              <a:t>  Microservices and the First Law of Distributed Objects, Martin Fowler, martinfowler.com, 2014, https://martinfowler.com/articles/distributed-objects-microservices.html</a:t>
+              <a:t>[Fowler 2015a]</a:t>
+            </a:r>
+            <a:r>
+              <a:rPr sz="800" b="0">
+                <a:solidFill>
+                  <a:srgbClr val="000000"/>
+                </a:solidFill>
+                <a:latin typeface="맑은 고딕"/>
+                <a:ea typeface="맑은 고딕"/>
+              </a:rPr>
+              <a:t>  Yagni, Martin Fowler, martinfowler.com, 2015, https://martinfowler.com/bliki/Yagni.html</a:t>
             </a:r>
           </a:p>
           <a:p>
@@ -3178,17 +3178,17 @@
                 <a:latin typeface="맑은 고딕"/>
                 <a:ea typeface="맑은 고딕"/>
               </a:rPr>
-              <a:t>[Fowler 2015a]</a:t>
-            </a:r>
-            <a:r>
-              <a:rPr sz="800" b="0">
-                <a:solidFill>
-                  <a:srgbClr val="000000"/>
-                </a:solidFill>
-                <a:latin typeface="맑은 고딕"/>
-                <a:ea typeface="맑은 고딕"/>
-              </a:rPr>
-              <a:t>  Yagni, Martin Fowler, martinfowler.com, 2015, https://martinfowler.com/bliki/Yagni.html</a:t>
+              <a:t>[Fowler 2015b]</a:t>
+            </a:r>
+            <a:r>
+              <a:rPr sz="800" b="0">
+                <a:solidFill>
+                  <a:srgbClr val="000000"/>
+                </a:solidFill>
+                <a:latin typeface="맑은 고딕"/>
+                <a:ea typeface="맑은 고딕"/>
+              </a:rPr>
+              <a:t>  BeckDesignRules, Martin Fowler, martinfowler.com, 2015, https://martinfowler.com/bliki/BeckDesignRules.html</a:t>
             </a:r>
           </a:p>
           <a:p>
@@ -3219,17 +3219,17 @@
                 <a:latin typeface="맑은 고딕"/>
                 <a:ea typeface="맑은 고딕"/>
               </a:rPr>
-              <a:t>[Fowler 2015b]</a:t>
-            </a:r>
-            <a:r>
-              <a:rPr sz="800" b="0">
-                <a:solidFill>
-                  <a:srgbClr val="000000"/>
-                </a:solidFill>
-                <a:latin typeface="맑은 고딕"/>
-                <a:ea typeface="맑은 고딕"/>
-              </a:rPr>
-              <a:t>  BeckDesignRules, Martin Fowler, martinfowler.com, 2015, https://martinfowler.com/bliki/BeckDesignRules.html</a:t>
+              <a:t>[Fowler 2015c]</a:t>
+            </a:r>
+            <a:r>
+              <a:rPr sz="800" b="0">
+                <a:solidFill>
+                  <a:srgbClr val="000000"/>
+                </a:solidFill>
+                <a:latin typeface="맑은 고딕"/>
+                <a:ea typeface="맑은 고딕"/>
+              </a:rPr>
+              <a:t>  MonolithFirst, Martin Fowler, martinfowler.com, 2015, https://martinfowler.com/bliki/MonolithFirst.html</a:t>
             </a:r>
           </a:p>
           <a:p>
@@ -3260,17 +3260,17 @@
                 <a:latin typeface="맑은 고딕"/>
                 <a:ea typeface="맑은 고딕"/>
               </a:rPr>
-              <a:t>[Fowler 2015c]</a:t>
-            </a:r>
-            <a:r>
-              <a:rPr sz="800" b="0">
-                <a:solidFill>
-                  <a:srgbClr val="000000"/>
-                </a:solidFill>
-                <a:latin typeface="맑은 고딕"/>
-                <a:ea typeface="맑은 고딕"/>
-              </a:rPr>
-              <a:t>  MonolithFirst, Martin Fowler, martinfowler.com, 2015, https://martinfowler.com/bliki/MonolithFirst.html</a:t>
+              <a:t>[Fowler 2015d]</a:t>
+            </a:r>
+            <a:r>
+              <a:rPr sz="800" b="0">
+                <a:solidFill>
+                  <a:srgbClr val="000000"/>
+                </a:solidFill>
+                <a:latin typeface="맑은 고딕"/>
+                <a:ea typeface="맑은 고딕"/>
+              </a:rPr>
+              <a:t>  MicroservicePremium, Martin Fowler, martinfowler.com, 2015, https://martinfowler.com/bliki/MicroservicePremium.html</a:t>
             </a:r>
           </a:p>
           <a:p>
@@ -3301,17 +3301,17 @@
                 <a:latin typeface="맑은 고딕"/>
                 <a:ea typeface="맑은 고딕"/>
               </a:rPr>
-              <a:t>[Fowler 2015d]</a:t>
-            </a:r>
-            <a:r>
-              <a:rPr sz="800" b="0">
-                <a:solidFill>
-                  <a:srgbClr val="000000"/>
-                </a:solidFill>
-                <a:latin typeface="맑은 고딕"/>
-                <a:ea typeface="맑은 고딕"/>
-              </a:rPr>
-              <a:t>  MicroservicePremium, Martin Fowler, martinfowler.com, 2015, https://martinfowler.com/bliki/MicroservicePremium.html</a:t>
+              <a:t>[Fowler 2024]</a:t>
+            </a:r>
+            <a:r>
+              <a:rPr sz="800" b="0">
+                <a:solidFill>
+                  <a:srgbClr val="000000"/>
+                </a:solidFill>
+                <a:latin typeface="맑은 고딕"/>
+                <a:ea typeface="맑은 고딕"/>
+              </a:rPr>
+              <a:t>  Continuous Integration, Martin Fowler, martinfowler.com, 2024, https://martinfowler.com/articles/continuousIntegration.html</a:t>
             </a:r>
           </a:p>
           <a:p>
@@ -3342,17 +3342,17 @@
                 <a:latin typeface="맑은 고딕"/>
                 <a:ea typeface="맑은 고딕"/>
               </a:rPr>
-              <a:t>[Fowler 2024]</a:t>
-            </a:r>
-            <a:r>
-              <a:rPr sz="800" b="0">
-                <a:solidFill>
-                  <a:srgbClr val="000000"/>
-                </a:solidFill>
-                <a:latin typeface="맑은 고딕"/>
-                <a:ea typeface="맑은 고딕"/>
-              </a:rPr>
-              <a:t>  Continuous Integration, Martin Fowler, martinfowler.com, 2024, https://martinfowler.com/articles/continuousIntegration.html</a:t>
+              <a:t>[Gamma 외 1994]</a:t>
+            </a:r>
+            <a:r>
+              <a:rPr sz="800" b="0">
+                <a:solidFill>
+                  <a:srgbClr val="000000"/>
+                </a:solidFill>
+                <a:latin typeface="맑은 고딕"/>
+                <a:ea typeface="맑은 고딕"/>
+              </a:rPr>
+              <a:t>  Design Patterns: Elements of Reusable Object-Oriented Software, Erich Gamma·Richard Helm·Ralph Johnson·John Vlissides, Addison-Wesley, 1994</a:t>
             </a:r>
           </a:p>
           <a:p>
@@ -3383,17 +3383,27 @@
                 <a:latin typeface="맑은 고딕"/>
                 <a:ea typeface="맑은 고딕"/>
               </a:rPr>
-              <a:t>[Gamma 외 1994]</a:t>
-            </a:r>
-            <a:r>
-              <a:rPr sz="800" b="0">
-                <a:solidFill>
-                  <a:srgbClr val="000000"/>
-                </a:solidFill>
-                <a:latin typeface="맑은 고딕"/>
-                <a:ea typeface="맑은 고딕"/>
-              </a:rPr>
-              <a:t>  Design Patterns: Elements of Reusable Object-Oriented Software, Erich Gamma·Richard Helm·Ralph Johnson·John Vlissides, Addison-Wesley, 1994</a:t>
+              <a:t>[Gamma 2005]</a:t>
+            </a:r>
+            <a:r>
+              <a:rPr sz="800" b="0">
+                <a:solidFill>
+                  <a:srgbClr val="000000"/>
+                </a:solidFill>
+                <a:latin typeface="맑은 고딕"/>
+                <a:ea typeface="맑은 고딕"/>
+              </a:rPr>
+              <a:t>  Design Principles from Design Patterns —</a:t>
+            </a:r>
+            <a:r>
+              <a:rPr sz="800" b="0">
+                <a:solidFill>
+                  <a:srgbClr val="000000"/>
+                </a:solidFill>
+                <a:latin typeface="맑은 고딕"/>
+                <a:ea typeface="맑은 고딕"/>
+              </a:rPr>
+              <a:t> A Conversation with Erich Gamma, Part III, Bill Venners, Artima, 2005, https://www.artima.com/articles/design-principles-from-design-patterns</a:t>
             </a:r>
           </a:p>
           <a:p>
@@ -3424,27 +3434,37 @@
                 <a:latin typeface="맑은 고딕"/>
                 <a:ea typeface="맑은 고딕"/>
               </a:rPr>
-              <a:t>[Gamma 2005]</a:t>
-            </a:r>
-            <a:r>
-              <a:rPr sz="800" b="0">
-                <a:solidFill>
-                  <a:srgbClr val="000000"/>
-                </a:solidFill>
-                <a:latin typeface="맑은 고딕"/>
-                <a:ea typeface="맑은 고딕"/>
-              </a:rPr>
-              <a:t>  Design Principles from Design Patterns —</a:t>
-            </a:r>
-            <a:r>
-              <a:rPr sz="800" b="0">
-                <a:solidFill>
-                  <a:srgbClr val="000000"/>
-                </a:solidFill>
-                <a:latin typeface="맑은 고딕"/>
-                <a:ea typeface="맑은 고딕"/>
-              </a:rPr>
-              <a:t> A Conversation with Erich Gamma, Part III, Bill Venners, Artima, 2005, https://www.artima.com/articles/design-principles-from-design-patterns</a:t>
+              <a:t>[Gruber 1993]</a:t>
+            </a:r>
+            <a:r>
+              <a:rPr sz="800" b="0">
+                <a:solidFill>
+                  <a:srgbClr val="000000"/>
+                </a:solidFill>
+                <a:latin typeface="맑은 고딕"/>
+                <a:ea typeface="맑은 고딕"/>
+              </a:rPr>
+              <a:t>  A Translation Approach to Portable Ontology Specifications, Thomas R. Gruber, Knowledge Acquisition 5</a:t>
+            </a:r>
+            <a:r>
+              <a:rPr sz="800" b="0">
+                <a:solidFill>
+                  <a:srgbClr val="000000"/>
+                </a:solidFill>
+                <a:latin typeface="맑은 고딕"/>
+                <a:ea typeface="맑은 고딕"/>
+              </a:rPr>
+              <a:t>(2)</a:t>
+            </a:r>
+            <a:r>
+              <a:rPr sz="800" b="0">
+                <a:solidFill>
+                  <a:srgbClr val="000000"/>
+                </a:solidFill>
+                <a:latin typeface="맑은 고딕"/>
+                <a:ea typeface="맑은 고딕"/>
+              </a:rPr>
+              <a:t>, 1993</a:t>
             </a:r>
           </a:p>
           <a:p>
@@ -3475,17 +3495,58 @@
                 <a:latin typeface="맑은 고딕"/>
                 <a:ea typeface="맑은 고딕"/>
               </a:rPr>
-              <a:t>[Gruber 1993]</a:t>
-            </a:r>
-            <a:r>
-              <a:rPr sz="800" b="0">
-                <a:solidFill>
-                  <a:srgbClr val="000000"/>
-                </a:solidFill>
-                <a:latin typeface="맑은 고딕"/>
-                <a:ea typeface="맑은 고딕"/>
-              </a:rPr>
-              <a:t>  A Translation Approach to Portable Ontology Specifications, Thomas R. Gruber, Knowledge Acquisition 5</a:t>
+              <a:t>[Harel 1987]</a:t>
+            </a:r>
+            <a:r>
+              <a:rPr sz="800" b="0">
+                <a:solidFill>
+                  <a:srgbClr val="000000"/>
+                </a:solidFill>
+                <a:latin typeface="맑은 고딕"/>
+                <a:ea typeface="맑은 고딕"/>
+              </a:rPr>
+              <a:t>  Statecharts: A Visual Formalism for Complex Systems, David Harel, Science of Computer Programming, 1987</a:t>
+            </a:r>
+          </a:p>
+          <a:p>
+            <a:pPr lvl="2" marL="167640" indent="-167640">
+              <a:spcBef>
+                <a:spcPts val="100"/>
+              </a:spcBef>
+              <a:spcAft>
+                <a:spcPts val="100"/>
+              </a:spcAft>
+              <a:buNone/>
+            </a:pPr>
+            <a:r>
+              <a:rPr sz="800" b="0">
+                <a:solidFill>
+                  <a:srgbClr val="000000"/>
+                </a:solidFill>
+                <a:latin typeface="맑은 고딕"/>
+                <a:ea typeface="맑은 고딕"/>
+              </a:rPr>
+              <a:t>37. </a:t>
+            </a:r>
+            <a:r>
+              <a:rPr sz="800" b="1">
+                <a:solidFill>
+                  <a:srgbClr val="000000"/>
+                </a:solidFill>
+                <a:latin typeface="맑은 고딕"/>
+                <a:ea typeface="맑은 고딕"/>
+              </a:rPr>
+              <a:t>[Hoare 1981]</a:t>
+            </a:r>
+            <a:r>
+              <a:rPr sz="800" b="0">
+                <a:solidFill>
+                  <a:srgbClr val="000000"/>
+                </a:solidFill>
+                <a:latin typeface="맑은 고딕"/>
+                <a:ea typeface="맑은 고딕"/>
+              </a:rPr>
+              <a:t>  The Emperor's Old Clothes, C. A. R. Hoare, Communications of the ACM 24</a:t>
             </a:r>
             <a:r>
               <a:rPr sz="800" b="0">
@@ -3505,7 +3566,7 @@
                 <a:latin typeface="맑은 고딕"/>
                 <a:ea typeface="맑은 고딕"/>
               </a:rPr>
-              <a:t>, 1993</a:t>
+              <a:t>, 1981</a:t>
             </a:r>
           </a:p>
           <a:p>
@@ -3526,27 +3587,27 @@
                 <a:latin typeface="맑은 고딕"/>
                 <a:ea typeface="맑은 고딕"/>
               </a:rPr>
-              <a:t>37. </a:t>
-            </a:r>
-            <a:r>
-              <a:rPr sz="800" b="1">
-                <a:solidFill>
-                  <a:srgbClr val="000000"/>
-                </a:solidFill>
-                <a:latin typeface="맑은 고딕"/>
-                <a:ea typeface="맑은 고딕"/>
-              </a:rPr>
-              <a:t>[Harel 1987]</a:t>
-            </a:r>
-            <a:r>
-              <a:rPr sz="800" b="0">
-                <a:solidFill>
-                  <a:srgbClr val="000000"/>
-                </a:solidFill>
-                <a:latin typeface="맑은 고딕"/>
-                <a:ea typeface="맑은 고딕"/>
-              </a:rPr>
-              <a:t>  Statecharts: A Visual Formalism for Complex Systems, David Harel, Science of Computer Programming, 1987</a:t>
+              <a:t>38. </a:t>
+            </a:r>
+            <a:r>
+              <a:rPr sz="800" b="1">
+                <a:solidFill>
+                  <a:srgbClr val="000000"/>
+                </a:solidFill>
+                <a:latin typeface="맑은 고딕"/>
+                <a:ea typeface="맑은 고딕"/>
+              </a:rPr>
+              <a:t>[Humble]</a:t>
+            </a:r>
+            <a:r>
+              <a:rPr sz="800" b="0">
+                <a:solidFill>
+                  <a:srgbClr val="000000"/>
+                </a:solidFill>
+                <a:latin typeface="맑은 고딕"/>
+                <a:ea typeface="맑은 고딕"/>
+              </a:rPr>
+              <a:t>  Principles, Jez Humble, continuousdelivery.com, https://continuousdelivery.com/principles/</a:t>
             </a:r>
           </a:p>
           <a:p>
@@ -3567,47 +3628,27 @@
                 <a:latin typeface="맑은 고딕"/>
                 <a:ea typeface="맑은 고딕"/>
               </a:rPr>
-              <a:t>38. </a:t>
-            </a:r>
-            <a:r>
-              <a:rPr sz="800" b="1">
-                <a:solidFill>
-                  <a:srgbClr val="000000"/>
-                </a:solidFill>
-                <a:latin typeface="맑은 고딕"/>
-                <a:ea typeface="맑은 고딕"/>
-              </a:rPr>
-              <a:t>[Hoare 1981]</a:t>
-            </a:r>
-            <a:r>
-              <a:rPr sz="800" b="0">
-                <a:solidFill>
-                  <a:srgbClr val="000000"/>
-                </a:solidFill>
-                <a:latin typeface="맑은 고딕"/>
-                <a:ea typeface="맑은 고딕"/>
-              </a:rPr>
-              <a:t>  The Emperor's Old Clothes, C. A. R. Hoare, Communications of the ACM 24</a:t>
-            </a:r>
-            <a:r>
-              <a:rPr sz="800" b="0">
-                <a:solidFill>
-                  <a:srgbClr val="000000"/>
-                </a:solidFill>
-                <a:latin typeface="맑은 고딕"/>
-                <a:ea typeface="맑은 고딕"/>
-              </a:rPr>
-              <a:t>(2)</a:t>
-            </a:r>
-            <a:r>
-              <a:rPr sz="800" b="0">
-                <a:solidFill>
-                  <a:srgbClr val="000000"/>
-                </a:solidFill>
-                <a:latin typeface="맑은 고딕"/>
-                <a:ea typeface="맑은 고딕"/>
-              </a:rPr>
-              <a:t>, 1981</a:t>
+              <a:t>39. </a:t>
+            </a:r>
+            <a:r>
+              <a:rPr sz="800" b="1">
+                <a:solidFill>
+                  <a:srgbClr val="000000"/>
+                </a:solidFill>
+                <a:latin typeface="맑은 고딕"/>
+                <a:ea typeface="맑은 고딕"/>
+              </a:rPr>
+              <a:t>[IIBA 2017]</a:t>
+            </a:r>
+            <a:r>
+              <a:rPr sz="800" b="0">
+                <a:solidFill>
+                  <a:srgbClr val="000000"/>
+                </a:solidFill>
+                <a:latin typeface="맑은 고딕"/>
+                <a:ea typeface="맑은 고딕"/>
+              </a:rPr>
+              <a:t>  Global Business Analysis Core Standard, International Institute of Business Analysis, 2017, https://www.iiba.org/globalassets/standards-and-resources/core-standard/iiba-core-standard.pdf</a:t>
             </a:r>
           </a:p>
           <a:p>
@@ -3628,27 +3669,27 @@
                 <a:latin typeface="맑은 고딕"/>
                 <a:ea typeface="맑은 고딕"/>
               </a:rPr>
-              <a:t>39. </a:t>
-            </a:r>
-            <a:r>
-              <a:rPr sz="800" b="1">
-                <a:solidFill>
-                  <a:srgbClr val="000000"/>
-                </a:solidFill>
-                <a:latin typeface="맑은 고딕"/>
-                <a:ea typeface="맑은 고딕"/>
-              </a:rPr>
-              <a:t>[Humble]</a:t>
-            </a:r>
-            <a:r>
-              <a:rPr sz="800" b="0">
-                <a:solidFill>
-                  <a:srgbClr val="000000"/>
-                </a:solidFill>
-                <a:latin typeface="맑은 고딕"/>
-                <a:ea typeface="맑은 고딕"/>
-              </a:rPr>
-              <a:t>  Principles, Jez Humble, continuousdelivery.com, https://continuousdelivery.com/principles/</a:t>
+              <a:t>40. </a:t>
+            </a:r>
+            <a:r>
+              <a:rPr sz="800" b="1">
+                <a:solidFill>
+                  <a:srgbClr val="000000"/>
+                </a:solidFill>
+                <a:latin typeface="맑은 고딕"/>
+                <a:ea typeface="맑은 고딕"/>
+              </a:rPr>
+              <a:t>[IIBA 2022]</a:t>
+            </a:r>
+            <a:r>
+              <a:rPr sz="800" b="0">
+                <a:solidFill>
+                  <a:srgbClr val="000000"/>
+                </a:solidFill>
+                <a:latin typeface="맑은 고딕"/>
+                <a:ea typeface="맑은 고딕"/>
+              </a:rPr>
+              <a:t>  The Business Analysis Standard, IIBA, 2022</a:t>
             </a:r>
           </a:p>
           <a:p>
@@ -3669,47 +3710,6 @@
                 <a:latin typeface="맑은 고딕"/>
                 <a:ea typeface="맑은 고딕"/>
               </a:rPr>
-              <a:t>40. </a:t>
-            </a:r>
-            <a:r>
-              <a:rPr sz="800" b="1">
-                <a:solidFill>
-                  <a:srgbClr val="000000"/>
-                </a:solidFill>
-                <a:latin typeface="맑은 고딕"/>
-                <a:ea typeface="맑은 고딕"/>
-              </a:rPr>
-              <a:t>[IIBA 2022]</a:t>
-            </a:r>
-            <a:r>
-              <a:rPr sz="800" b="0">
-                <a:solidFill>
-                  <a:srgbClr val="000000"/>
-                </a:solidFill>
-                <a:latin typeface="맑은 고딕"/>
-                <a:ea typeface="맑은 고딕"/>
-              </a:rPr>
-              <a:t>  The Business Analysis Standard, IIBA, 2022</a:t>
-            </a:r>
-          </a:p>
-          <a:p>
-            <a:pPr lvl="2" marL="167640" indent="-167640">
-              <a:spcBef>
-                <a:spcPts val="100"/>
-              </a:spcBef>
-              <a:spcAft>
-                <a:spcPts val="100"/>
-              </a:spcAft>
-              <a:buNone/>
-            </a:pPr>
-            <a:r>
-              <a:rPr sz="800" b="0">
-                <a:solidFill>
-                  <a:srgbClr val="000000"/>
-                </a:solidFill>
-                <a:latin typeface="맑은 고딕"/>
-                <a:ea typeface="맑은 고딕"/>
-              </a:rPr>
               <a:t>41. </a:t>
             </a:r>
             <a:r>
@@ -3731,47 +3731,6 @@
                 <a:ea typeface="맑은 고딕"/>
               </a:rPr>
               <a:t>  Object-Oriented Software Engineering: A Use Case Driven Approach, Ivar Jacobson 외, Addison-Wesley, 1992</a:t>
-            </a:r>
-          </a:p>
-          <a:p>
-            <a:pPr lvl="2" marL="167640" indent="-167640">
-              <a:spcBef>
-                <a:spcPts val="100"/>
-              </a:spcBef>
-              <a:spcAft>
-                <a:spcPts val="100"/>
-              </a:spcAft>
-              <a:buNone/>
-            </a:pPr>
-            <a:r>
-              <a:rPr sz="800" b="0">
-                <a:solidFill>
-                  <a:srgbClr val="000000"/>
-                </a:solidFill>
-                <a:latin typeface="맑은 고딕"/>
-                <a:ea typeface="맑은 고딕"/>
-              </a:rPr>
-              <a:t>42. </a:t>
-            </a:r>
-            <a:r>
-              <a:rPr sz="800" b="1">
-                <a:solidFill>
-                  <a:srgbClr val="000000"/>
-                </a:solidFill>
-                <a:latin typeface="맑은 고딕"/>
-                <a:ea typeface="맑은 고딕"/>
-              </a:rPr>
-              <a:t>[Jeffries 2001]</a:t>
-            </a:r>
-            <a:r>
-              <a:rPr sz="800" b="0">
-                <a:solidFill>
-                  <a:srgbClr val="000000"/>
-                </a:solidFill>
-                <a:latin typeface="맑은 고딕"/>
-                <a:ea typeface="맑은 고딕"/>
-              </a:rPr>
-              <a:t>  Essential XP: Card, Conversation, Confirmation, Ron Jeffries, 2001</a:t>
             </a:r>
           </a:p>
         </p:txBody>
@@ -4014,6 +3973,47 @@
                 <a:latin typeface="맑은 고딕"/>
                 <a:ea typeface="맑은 고딕"/>
               </a:rPr>
+              <a:t>42. </a:t>
+            </a:r>
+            <a:r>
+              <a:rPr sz="800" b="1">
+                <a:solidFill>
+                  <a:srgbClr val="000000"/>
+                </a:solidFill>
+                <a:latin typeface="맑은 고딕"/>
+                <a:ea typeface="맑은 고딕"/>
+              </a:rPr>
+              <a:t>[Jeffries 2001]</a:t>
+            </a:r>
+            <a:r>
+              <a:rPr sz="800" b="0">
+                <a:solidFill>
+                  <a:srgbClr val="000000"/>
+                </a:solidFill>
+                <a:latin typeface="맑은 고딕"/>
+                <a:ea typeface="맑은 고딕"/>
+              </a:rPr>
+              <a:t>  Essential XP: Card, Conversation, Confirmation, Ron Jeffries, 2001</a:t>
+            </a:r>
+          </a:p>
+          <a:p>
+            <a:pPr lvl="2" marL="167640" indent="-167640">
+              <a:spcBef>
+                <a:spcPts val="100"/>
+              </a:spcBef>
+              <a:spcAft>
+                <a:spcPts val="100"/>
+              </a:spcAft>
+              <a:buNone/>
+            </a:pPr>
+            <a:r>
+              <a:rPr sz="800" b="0">
+                <a:solidFill>
+                  <a:srgbClr val="000000"/>
+                </a:solidFill>
+                <a:latin typeface="맑은 고딕"/>
+                <a:ea typeface="맑은 고딕"/>
+              </a:rPr>
               <a:t>43. </a:t>
             </a:r>
             <a:r>
@@ -4034,7 +4034,7 @@
                 <a:latin typeface="맑은 고딕"/>
                 <a:ea typeface="맑은 고딕"/>
               </a:rPr>
-              <a:t>  XP 2002 기조 발표, Jim Johnson</a:t>
+              <a:t>  XP 2002 발표, Jim Johnson</a:t>
             </a:r>
             <a:r>
               <a:rPr sz="800" b="0">

--- a/courses/ooad/sessions/references.pptx
+++ b/courses/ooad/sessions/references.pptx
@@ -2249,6 +2249,47 @@
                 <a:latin typeface="맑은 고딕"/>
                 <a:ea typeface="맑은 고딕"/>
               </a:rPr>
+              <a:t>[Böckeler 2025]</a:t>
+            </a:r>
+            <a:r>
+              <a:rPr sz="800" b="0">
+                <a:solidFill>
+                  <a:srgbClr val="000000"/>
+                </a:solidFill>
+                <a:latin typeface="맑은 고딕"/>
+                <a:ea typeface="맑은 고딕"/>
+              </a:rPr>
+              <a:t>  Understanding Spec-Driven-Development: Kiro, spec-kit, and Tessl, Birgitta Böckeler, martinfowler.com, 2025, https://martinfowler.com/articles/exploring-gen-ai/sdd-3-tools.html</a:t>
+            </a:r>
+          </a:p>
+          <a:p>
+            <a:pPr lvl="2" marL="167640" indent="-167640">
+              <a:spcBef>
+                <a:spcPts val="100"/>
+              </a:spcBef>
+              <a:spcAft>
+                <a:spcPts val="100"/>
+              </a:spcAft>
+              <a:buNone/>
+            </a:pPr>
+            <a:r>
+              <a:rPr sz="800" b="0">
+                <a:solidFill>
+                  <a:srgbClr val="000000"/>
+                </a:solidFill>
+                <a:latin typeface="맑은 고딕"/>
+                <a:ea typeface="맑은 고딕"/>
+              </a:rPr>
+              <a:t>10. </a:t>
+            </a:r>
+            <a:r>
+              <a:rPr sz="800" b="1">
+                <a:solidFill>
+                  <a:srgbClr val="000000"/>
+                </a:solidFill>
+                <a:latin typeface="맑은 고딕"/>
+                <a:ea typeface="맑은 고딕"/>
+              </a:rPr>
               <a:t>[Böckeler 2026]</a:t>
             </a:r>
             <a:r>
@@ -2280,7 +2321,7 @@
                 <a:latin typeface="맑은 고딕"/>
                 <a:ea typeface="맑은 고딕"/>
               </a:rPr>
-              <a:t>10. </a:t>
+              <a:t>11. </a:t>
             </a:r>
             <a:r>
               <a:rPr sz="800" b="1">
@@ -2341,7 +2382,7 @@
                 <a:latin typeface="맑은 고딕"/>
                 <a:ea typeface="맑은 고딕"/>
               </a:rPr>
-              <a:t>11. </a:t>
+              <a:t>12. </a:t>
             </a:r>
             <a:r>
               <a:rPr sz="800" b="1">
@@ -2382,7 +2423,7 @@
                 <a:latin typeface="맑은 고딕"/>
                 <a:ea typeface="맑은 고딕"/>
               </a:rPr>
-              <a:t>12. </a:t>
+              <a:t>13. </a:t>
             </a:r>
             <a:r>
               <a:rPr sz="800" b="1">
@@ -2433,7 +2474,7 @@
                 <a:latin typeface="맑은 고딕"/>
                 <a:ea typeface="맑은 고딕"/>
               </a:rPr>
-              <a:t>13. </a:t>
+              <a:t>14. </a:t>
             </a:r>
             <a:r>
               <a:rPr sz="800" b="1">
@@ -2484,7 +2525,7 @@
                 <a:latin typeface="맑은 고딕"/>
                 <a:ea typeface="맑은 고딕"/>
               </a:rPr>
-              <a:t>14. </a:t>
+              <a:t>15. </a:t>
             </a:r>
             <a:r>
               <a:rPr sz="800" b="1">
@@ -2525,7 +2566,7 @@
                 <a:latin typeface="맑은 고딕"/>
                 <a:ea typeface="맑은 고딕"/>
               </a:rPr>
-              <a:t>15. </a:t>
+              <a:t>16. </a:t>
             </a:r>
             <a:r>
               <a:rPr sz="800" b="1">
@@ -2546,272 +2587,6 @@
                 <a:ea typeface="맑은 고딕"/>
               </a:rPr>
               <a:t>  Writing Effective Use Cases, Alistair Cockburn, Addison-Wesley, 2001</a:t>
-            </a:r>
-          </a:p>
-          <a:p>
-            <a:pPr lvl="2" marL="167640" indent="-167640">
-              <a:spcBef>
-                <a:spcPts val="100"/>
-              </a:spcBef>
-              <a:spcAft>
-                <a:spcPts val="100"/>
-              </a:spcAft>
-              <a:buNone/>
-            </a:pPr>
-            <a:r>
-              <a:rPr sz="800" b="0">
-                <a:solidFill>
-                  <a:srgbClr val="000000"/>
-                </a:solidFill>
-                <a:latin typeface="맑은 고딕"/>
-                <a:ea typeface="맑은 고딕"/>
-              </a:rPr>
-              <a:t>16. </a:t>
-            </a:r>
-            <a:r>
-              <a:rPr sz="800" b="1">
-                <a:solidFill>
-                  <a:srgbClr val="000000"/>
-                </a:solidFill>
-                <a:latin typeface="맑은 고딕"/>
-                <a:ea typeface="맑은 고딕"/>
-              </a:rPr>
-              <a:t>[Conway 1968]</a:t>
-            </a:r>
-            <a:r>
-              <a:rPr sz="800" b="0">
-                <a:solidFill>
-                  <a:srgbClr val="000000"/>
-                </a:solidFill>
-                <a:latin typeface="맑은 고딕"/>
-                <a:ea typeface="맑은 고딕"/>
-              </a:rPr>
-              <a:t>  How Do Committees Invent?, Melvin E. Conway, Datamation, 1968</a:t>
-            </a:r>
-          </a:p>
-          <a:p>
-            <a:pPr lvl="2" marL="167640" indent="-167640">
-              <a:spcBef>
-                <a:spcPts val="100"/>
-              </a:spcBef>
-              <a:spcAft>
-                <a:spcPts val="100"/>
-              </a:spcAft>
-              <a:buNone/>
-            </a:pPr>
-            <a:r>
-              <a:rPr sz="800" b="0">
-                <a:solidFill>
-                  <a:srgbClr val="000000"/>
-                </a:solidFill>
-                <a:latin typeface="맑은 고딕"/>
-                <a:ea typeface="맑은 고딕"/>
-              </a:rPr>
-              <a:t>17. </a:t>
-            </a:r>
-            <a:r>
-              <a:rPr sz="800" b="1">
-                <a:solidFill>
-                  <a:srgbClr val="000000"/>
-                </a:solidFill>
-                <a:latin typeface="맑은 고딕"/>
-                <a:ea typeface="맑은 고딕"/>
-              </a:rPr>
-              <a:t>[Cucumber]</a:t>
-            </a:r>
-            <a:r>
-              <a:rPr sz="800" b="0">
-                <a:solidFill>
-                  <a:srgbClr val="000000"/>
-                </a:solidFill>
-                <a:latin typeface="맑은 고딕"/>
-                <a:ea typeface="맑은 고딕"/>
-              </a:rPr>
-              <a:t>  Behaviour-Driven Development, Cucumber documentation</a:t>
-            </a:r>
-          </a:p>
-          <a:p>
-            <a:pPr lvl="2" marL="167640" indent="-167640">
-              <a:spcBef>
-                <a:spcPts val="100"/>
-              </a:spcBef>
-              <a:spcAft>
-                <a:spcPts val="100"/>
-              </a:spcAft>
-              <a:buNone/>
-            </a:pPr>
-            <a:r>
-              <a:rPr sz="800" b="0">
-                <a:solidFill>
-                  <a:srgbClr val="000000"/>
-                </a:solidFill>
-                <a:latin typeface="맑은 고딕"/>
-                <a:ea typeface="맑은 고딕"/>
-              </a:rPr>
-              <a:t>18. </a:t>
-            </a:r>
-            <a:r>
-              <a:rPr sz="800" b="1">
-                <a:solidFill>
-                  <a:srgbClr val="000000"/>
-                </a:solidFill>
-                <a:latin typeface="맑은 고딕"/>
-                <a:ea typeface="맑은 고딕"/>
-              </a:rPr>
-              <a:t>[Dijkstra]</a:t>
-            </a:r>
-            <a:r>
-              <a:rPr sz="800" b="0">
-                <a:solidFill>
-                  <a:srgbClr val="000000"/>
-                </a:solidFill>
-                <a:latin typeface="맑은 고딕"/>
-                <a:ea typeface="맑은 고딕"/>
-              </a:rPr>
-              <a:t>  On the Reliability of Programs </a:t>
-            </a:r>
-            <a:r>
-              <a:rPr sz="800" b="0">
-                <a:solidFill>
-                  <a:srgbClr val="000000"/>
-                </a:solidFill>
-                <a:latin typeface="맑은 고딕"/>
-                <a:ea typeface="맑은 고딕"/>
-              </a:rPr>
-              <a:t>(EWD303)</a:t>
-            </a:r>
-            <a:r>
-              <a:rPr sz="800" b="0">
-                <a:solidFill>
-                  <a:srgbClr val="000000"/>
-                </a:solidFill>
-                <a:latin typeface="맑은 고딕"/>
-                <a:ea typeface="맑은 고딕"/>
-              </a:rPr>
-              <a:t>, Edsger W. Dijkstra, https://www.cs.utexas.edu/~EWD/transcriptions/EWD03xx/EWD303.html</a:t>
-            </a:r>
-          </a:p>
-          <a:p>
-            <a:pPr lvl="2" marL="167640" indent="-167640">
-              <a:spcBef>
-                <a:spcPts val="100"/>
-              </a:spcBef>
-              <a:spcAft>
-                <a:spcPts val="100"/>
-              </a:spcAft>
-              <a:buNone/>
-            </a:pPr>
-            <a:r>
-              <a:rPr sz="800" b="0">
-                <a:solidFill>
-                  <a:srgbClr val="000000"/>
-                </a:solidFill>
-                <a:latin typeface="맑은 고딕"/>
-                <a:ea typeface="맑은 고딕"/>
-              </a:rPr>
-              <a:t>19. </a:t>
-            </a:r>
-            <a:r>
-              <a:rPr sz="800" b="1">
-                <a:solidFill>
-                  <a:srgbClr val="000000"/>
-                </a:solidFill>
-                <a:latin typeface="맑은 고딕"/>
-                <a:ea typeface="맑은 고딕"/>
-              </a:rPr>
-              <a:t>[Evans 2004]</a:t>
-            </a:r>
-            <a:r>
-              <a:rPr sz="800" b="0">
-                <a:solidFill>
-                  <a:srgbClr val="000000"/>
-                </a:solidFill>
-                <a:latin typeface="맑은 고딕"/>
-                <a:ea typeface="맑은 고딕"/>
-              </a:rPr>
-              <a:t>  Domain-Driven Design: Tackling Complexity in the Heart of Software, Eric Evans, Addison-Wesley, 2004</a:t>
-            </a:r>
-          </a:p>
-          <a:p>
-            <a:pPr lvl="2" marL="167640" indent="-167640">
-              <a:spcBef>
-                <a:spcPts val="100"/>
-              </a:spcBef>
-              <a:spcAft>
-                <a:spcPts val="100"/>
-              </a:spcAft>
-              <a:buNone/>
-            </a:pPr>
-            <a:r>
-              <a:rPr sz="800" b="0">
-                <a:solidFill>
-                  <a:srgbClr val="000000"/>
-                </a:solidFill>
-                <a:latin typeface="맑은 고딕"/>
-                <a:ea typeface="맑은 고딕"/>
-              </a:rPr>
-              <a:t>20. </a:t>
-            </a:r>
-            <a:r>
-              <a:rPr sz="800" b="1">
-                <a:solidFill>
-                  <a:srgbClr val="000000"/>
-                </a:solidFill>
-                <a:latin typeface="맑은 고딕"/>
-                <a:ea typeface="맑은 고딕"/>
-              </a:rPr>
-              <a:t>[Evans 2015]</a:t>
-            </a:r>
-            <a:r>
-              <a:rPr sz="800" b="0">
-                <a:solidFill>
-                  <a:srgbClr val="000000"/>
-                </a:solidFill>
-                <a:latin typeface="맑은 고딕"/>
-                <a:ea typeface="맑은 고딕"/>
-              </a:rPr>
-              <a:t>  Domain-Driven Design Reference, Eric Evans, Domain Language, 2015</a:t>
-            </a:r>
-          </a:p>
-          <a:p>
-            <a:pPr lvl="2" marL="167640" indent="-167640">
-              <a:spcBef>
-                <a:spcPts val="100"/>
-              </a:spcBef>
-              <a:spcAft>
-                <a:spcPts val="100"/>
-              </a:spcAft>
-              <a:buNone/>
-            </a:pPr>
-            <a:r>
-              <a:rPr sz="800" b="0">
-                <a:solidFill>
-                  <a:srgbClr val="000000"/>
-                </a:solidFill>
-                <a:latin typeface="맑은 고딕"/>
-                <a:ea typeface="맑은 고딕"/>
-              </a:rPr>
-              <a:t>21. </a:t>
-            </a:r>
-            <a:r>
-              <a:rPr sz="800" b="1">
-                <a:solidFill>
-                  <a:srgbClr val="000000"/>
-                </a:solidFill>
-                <a:latin typeface="맑은 고딕"/>
-                <a:ea typeface="맑은 고딕"/>
-              </a:rPr>
-              <a:t>[Fairbanks 2010]</a:t>
-            </a:r>
-            <a:r>
-              <a:rPr sz="800" b="0">
-                <a:solidFill>
-                  <a:srgbClr val="000000"/>
-                </a:solidFill>
-                <a:latin typeface="맑은 고딕"/>
-                <a:ea typeface="맑은 고딕"/>
-              </a:rPr>
-              <a:t>  Just Enough Software Architecture: A Risk-Driven Approach, George Fairbanks, Marshall &amp; Brainerd, 2010</a:t>
             </a:r>
           </a:p>
         </p:txBody>
@@ -2861,6 +2636,231 @@
                 <a:latin typeface="맑은 고딕"/>
                 <a:ea typeface="맑은 고딕"/>
               </a:rPr>
+              <a:t>17. </a:t>
+            </a:r>
+            <a:r>
+              <a:rPr sz="800" b="1">
+                <a:solidFill>
+                  <a:srgbClr val="000000"/>
+                </a:solidFill>
+                <a:latin typeface="맑은 고딕"/>
+                <a:ea typeface="맑은 고딕"/>
+              </a:rPr>
+              <a:t>[Conway 1968]</a:t>
+            </a:r>
+            <a:r>
+              <a:rPr sz="800" b="0">
+                <a:solidFill>
+                  <a:srgbClr val="000000"/>
+                </a:solidFill>
+                <a:latin typeface="맑은 고딕"/>
+                <a:ea typeface="맑은 고딕"/>
+              </a:rPr>
+              <a:t>  How Do Committees Invent?, Melvin E. Conway, Datamation, 1968, https://www.melconway.com/Home/pdf/committees.pdf</a:t>
+            </a:r>
+          </a:p>
+          <a:p>
+            <a:pPr lvl="2" marL="167640" indent="-167640">
+              <a:spcBef>
+                <a:spcPts val="100"/>
+              </a:spcBef>
+              <a:spcAft>
+                <a:spcPts val="100"/>
+              </a:spcAft>
+              <a:buNone/>
+            </a:pPr>
+            <a:r>
+              <a:rPr sz="800" b="0">
+                <a:solidFill>
+                  <a:srgbClr val="000000"/>
+                </a:solidFill>
+                <a:latin typeface="맑은 고딕"/>
+                <a:ea typeface="맑은 고딕"/>
+              </a:rPr>
+              <a:t>18. </a:t>
+            </a:r>
+            <a:r>
+              <a:rPr sz="800" b="1">
+                <a:solidFill>
+                  <a:srgbClr val="000000"/>
+                </a:solidFill>
+                <a:latin typeface="맑은 고딕"/>
+                <a:ea typeface="맑은 고딕"/>
+              </a:rPr>
+              <a:t>[Cucumber]</a:t>
+            </a:r>
+            <a:r>
+              <a:rPr sz="800" b="0">
+                <a:solidFill>
+                  <a:srgbClr val="000000"/>
+                </a:solidFill>
+                <a:latin typeface="맑은 고딕"/>
+                <a:ea typeface="맑은 고딕"/>
+              </a:rPr>
+              <a:t>  Behaviour-Driven Development, Cucumber documentation</a:t>
+            </a:r>
+          </a:p>
+          <a:p>
+            <a:pPr lvl="2" marL="167640" indent="-167640">
+              <a:spcBef>
+                <a:spcPts val="100"/>
+              </a:spcBef>
+              <a:spcAft>
+                <a:spcPts val="100"/>
+              </a:spcAft>
+              <a:buNone/>
+            </a:pPr>
+            <a:r>
+              <a:rPr sz="800" b="0">
+                <a:solidFill>
+                  <a:srgbClr val="000000"/>
+                </a:solidFill>
+                <a:latin typeface="맑은 고딕"/>
+                <a:ea typeface="맑은 고딕"/>
+              </a:rPr>
+              <a:t>19. </a:t>
+            </a:r>
+            <a:r>
+              <a:rPr sz="800" b="1">
+                <a:solidFill>
+                  <a:srgbClr val="000000"/>
+                </a:solidFill>
+                <a:latin typeface="맑은 고딕"/>
+                <a:ea typeface="맑은 고딕"/>
+              </a:rPr>
+              <a:t>[Cucumber: Example Mapping]</a:t>
+            </a:r>
+            <a:r>
+              <a:rPr sz="800" b="0">
+                <a:solidFill>
+                  <a:srgbClr val="000000"/>
+                </a:solidFill>
+                <a:latin typeface="맑은 고딕"/>
+                <a:ea typeface="맑은 고딕"/>
+              </a:rPr>
+              <a:t>  Example Mapping, Cucumber, https://cucumber.io/docs/bdd/example-mapping/</a:t>
+            </a:r>
+          </a:p>
+          <a:p>
+            <a:pPr lvl="2" marL="167640" indent="-167640">
+              <a:spcBef>
+                <a:spcPts val="100"/>
+              </a:spcBef>
+              <a:spcAft>
+                <a:spcPts val="100"/>
+              </a:spcAft>
+              <a:buNone/>
+            </a:pPr>
+            <a:r>
+              <a:rPr sz="800" b="0">
+                <a:solidFill>
+                  <a:srgbClr val="000000"/>
+                </a:solidFill>
+                <a:latin typeface="맑은 고딕"/>
+                <a:ea typeface="맑은 고딕"/>
+              </a:rPr>
+              <a:t>20. </a:t>
+            </a:r>
+            <a:r>
+              <a:rPr sz="800" b="1">
+                <a:solidFill>
+                  <a:srgbClr val="000000"/>
+                </a:solidFill>
+                <a:latin typeface="맑은 고딕"/>
+                <a:ea typeface="맑은 고딕"/>
+              </a:rPr>
+              <a:t>[Dijkstra]</a:t>
+            </a:r>
+            <a:r>
+              <a:rPr sz="800" b="0">
+                <a:solidFill>
+                  <a:srgbClr val="000000"/>
+                </a:solidFill>
+                <a:latin typeface="맑은 고딕"/>
+                <a:ea typeface="맑은 고딕"/>
+              </a:rPr>
+              <a:t>  On the Reliability of Programs </a:t>
+            </a:r>
+            <a:r>
+              <a:rPr sz="800" b="0">
+                <a:solidFill>
+                  <a:srgbClr val="000000"/>
+                </a:solidFill>
+                <a:latin typeface="맑은 고딕"/>
+                <a:ea typeface="맑은 고딕"/>
+              </a:rPr>
+              <a:t>(EWD303)</a:t>
+            </a:r>
+            <a:r>
+              <a:rPr sz="800" b="0">
+                <a:solidFill>
+                  <a:srgbClr val="000000"/>
+                </a:solidFill>
+                <a:latin typeface="맑은 고딕"/>
+                <a:ea typeface="맑은 고딕"/>
+              </a:rPr>
+              <a:t>, Edsger W. Dijkstra, https://www.cs.utexas.edu/~EWD/transcriptions/EWD03xx/EWD303.html</a:t>
+            </a:r>
+          </a:p>
+          <a:p>
+            <a:pPr lvl="2" marL="167640" indent="-167640">
+              <a:spcBef>
+                <a:spcPts val="100"/>
+              </a:spcBef>
+              <a:spcAft>
+                <a:spcPts val="100"/>
+              </a:spcAft>
+              <a:buNone/>
+            </a:pPr>
+            <a:r>
+              <a:rPr sz="800" b="0">
+                <a:solidFill>
+                  <a:srgbClr val="000000"/>
+                </a:solidFill>
+                <a:latin typeface="맑은 고딕"/>
+                <a:ea typeface="맑은 고딕"/>
+              </a:rPr>
+              <a:t>21. </a:t>
+            </a:r>
+            <a:r>
+              <a:rPr sz="800" b="1">
+                <a:solidFill>
+                  <a:srgbClr val="000000"/>
+                </a:solidFill>
+                <a:latin typeface="맑은 고딕"/>
+                <a:ea typeface="맑은 고딕"/>
+              </a:rPr>
+              <a:t>[Evans 2004]</a:t>
+            </a:r>
+            <a:r>
+              <a:rPr sz="800" b="0">
+                <a:solidFill>
+                  <a:srgbClr val="000000"/>
+                </a:solidFill>
+                <a:latin typeface="맑은 고딕"/>
+                <a:ea typeface="맑은 고딕"/>
+              </a:rPr>
+              <a:t>  Domain-Driven Design: Tackling Complexity in the Heart of Software, Eric Evans, Addison-Wesley, 2004</a:t>
+            </a:r>
+          </a:p>
+          <a:p>
+            <a:pPr lvl="2" marL="167640" indent="-167640">
+              <a:spcBef>
+                <a:spcPts val="100"/>
+              </a:spcBef>
+              <a:spcAft>
+                <a:spcPts val="100"/>
+              </a:spcAft>
+              <a:buNone/>
+            </a:pPr>
+            <a:r>
+              <a:rPr sz="800" b="0">
+                <a:solidFill>
+                  <a:srgbClr val="000000"/>
+                </a:solidFill>
+                <a:latin typeface="맑은 고딕"/>
+                <a:ea typeface="맑은 고딕"/>
+              </a:rPr>
               <a:t>22. </a:t>
             </a:r>
             <a:r>
@@ -2871,6 +2871,88 @@
                 <a:latin typeface="맑은 고딕"/>
                 <a:ea typeface="맑은 고딕"/>
               </a:rPr>
+              <a:t>[Evans 2015]</a:t>
+            </a:r>
+            <a:r>
+              <a:rPr sz="800" b="0">
+                <a:solidFill>
+                  <a:srgbClr val="000000"/>
+                </a:solidFill>
+                <a:latin typeface="맑은 고딕"/>
+                <a:ea typeface="맑은 고딕"/>
+              </a:rPr>
+              <a:t>  Domain-Driven Design Reference, Eric Evans, Domain Language, 2015</a:t>
+            </a:r>
+          </a:p>
+          <a:p>
+            <a:pPr lvl="2" marL="167640" indent="-167640">
+              <a:spcBef>
+                <a:spcPts val="100"/>
+              </a:spcBef>
+              <a:spcAft>
+                <a:spcPts val="100"/>
+              </a:spcAft>
+              <a:buNone/>
+            </a:pPr>
+            <a:r>
+              <a:rPr sz="800" b="0">
+                <a:solidFill>
+                  <a:srgbClr val="000000"/>
+                </a:solidFill>
+                <a:latin typeface="맑은 고딕"/>
+                <a:ea typeface="맑은 고딕"/>
+              </a:rPr>
+              <a:t>23. </a:t>
+            </a:r>
+            <a:r>
+              <a:rPr sz="800" b="1">
+                <a:solidFill>
+                  <a:srgbClr val="000000"/>
+                </a:solidFill>
+                <a:latin typeface="맑은 고딕"/>
+                <a:ea typeface="맑은 고딕"/>
+              </a:rPr>
+              <a:t>[Fairbanks 2010]</a:t>
+            </a:r>
+            <a:r>
+              <a:rPr sz="800" b="0">
+                <a:solidFill>
+                  <a:srgbClr val="000000"/>
+                </a:solidFill>
+                <a:latin typeface="맑은 고딕"/>
+                <a:ea typeface="맑은 고딕"/>
+              </a:rPr>
+              <a:t>  Just Enough Software Architecture: A Risk-Driven Approach, George Fairbanks, Marshall &amp; Brainerd, 2010</a:t>
+            </a:r>
+          </a:p>
+          <a:p>
+            <a:pPr lvl="2" marL="167640" indent="-167640">
+              <a:spcBef>
+                <a:spcPts val="100"/>
+              </a:spcBef>
+              <a:spcAft>
+                <a:spcPts val="100"/>
+              </a:spcAft>
+              <a:buNone/>
+            </a:pPr>
+            <a:r>
+              <a:rPr sz="800" b="0">
+                <a:solidFill>
+                  <a:srgbClr val="000000"/>
+                </a:solidFill>
+                <a:latin typeface="맑은 고딕"/>
+                <a:ea typeface="맑은 고딕"/>
+              </a:rPr>
+              <a:t>24. </a:t>
+            </a:r>
+            <a:r>
+              <a:rPr sz="800" b="1">
+                <a:solidFill>
+                  <a:srgbClr val="000000"/>
+                </a:solidFill>
+                <a:latin typeface="맑은 고딕"/>
+                <a:ea typeface="맑은 고딕"/>
+              </a:rPr>
               <a:t>[Fowler 2002]</a:t>
             </a:r>
             <a:r>
@@ -2902,7 +2984,7 @@
                 <a:latin typeface="맑은 고딕"/>
                 <a:ea typeface="맑은 고딕"/>
               </a:rPr>
-              <a:t>23. </a:t>
+              <a:t>25. </a:t>
             </a:r>
             <a:r>
               <a:rPr sz="800" b="1">
@@ -2943,7 +3025,7 @@
                 <a:latin typeface="맑은 고딕"/>
                 <a:ea typeface="맑은 고딕"/>
               </a:rPr>
-              <a:t>24. </a:t>
+              <a:t>26. </a:t>
             </a:r>
             <a:r>
               <a:rPr sz="800" b="1">
@@ -2983,7 +3065,7 @@
                 <a:latin typeface="맑은 고딕"/>
                 <a:ea typeface="맑은 고딕"/>
               </a:rPr>
-              <a:t>, 2003</a:t>
+              <a:t>, 2003, https://martinfowler.com/ieeeSoftware/whoNeedsArchitect.pdf</a:t>
             </a:r>
           </a:p>
           <a:p>
@@ -3004,7 +3086,7 @@
                 <a:latin typeface="맑은 고딕"/>
                 <a:ea typeface="맑은 고딕"/>
               </a:rPr>
-              <a:t>25. </a:t>
+              <a:t>27. </a:t>
             </a:r>
             <a:r>
               <a:rPr sz="800" b="1">
@@ -3045,7 +3127,7 @@
                 <a:latin typeface="맑은 고딕"/>
                 <a:ea typeface="맑은 고딕"/>
               </a:rPr>
-              <a:t>26. </a:t>
+              <a:t>28. </a:t>
             </a:r>
             <a:r>
               <a:rPr sz="800" b="1">
@@ -3086,7 +3168,7 @@
                 <a:latin typeface="맑은 고딕"/>
                 <a:ea typeface="맑은 고딕"/>
               </a:rPr>
-              <a:t>27. </a:t>
+              <a:t>29. </a:t>
             </a:r>
             <a:r>
               <a:rPr sz="800" b="1">
@@ -3127,7 +3209,7 @@
                 <a:latin typeface="맑은 고딕"/>
                 <a:ea typeface="맑은 고딕"/>
               </a:rPr>
-              <a:t>28. </a:t>
+              <a:t>30. </a:t>
             </a:r>
             <a:r>
               <a:rPr sz="800" b="1">
@@ -3168,7 +3250,7 @@
                 <a:latin typeface="맑은 고딕"/>
                 <a:ea typeface="맑은 고딕"/>
               </a:rPr>
-              <a:t>29. </a:t>
+              <a:t>31. </a:t>
             </a:r>
             <a:r>
               <a:rPr sz="800" b="1">
@@ -3209,7 +3291,7 @@
                 <a:latin typeface="맑은 고딕"/>
                 <a:ea typeface="맑은 고딕"/>
               </a:rPr>
-              <a:t>30. </a:t>
+              <a:t>32. </a:t>
             </a:r>
             <a:r>
               <a:rPr sz="800" b="1">
@@ -3250,7 +3332,7 @@
                 <a:latin typeface="맑은 고딕"/>
                 <a:ea typeface="맑은 고딕"/>
               </a:rPr>
-              <a:t>31. </a:t>
+              <a:t>33. </a:t>
             </a:r>
             <a:r>
               <a:rPr sz="800" b="1">
@@ -3291,7 +3373,7 @@
                 <a:latin typeface="맑은 고딕"/>
                 <a:ea typeface="맑은 고딕"/>
               </a:rPr>
-              <a:t>32. </a:t>
+              <a:t>34. </a:t>
             </a:r>
             <a:r>
               <a:rPr sz="800" b="1">
@@ -3312,425 +3394,6 @@
                 <a:ea typeface="맑은 고딕"/>
               </a:rPr>
               <a:t>  Continuous Integration, Martin Fowler, martinfowler.com, 2024, https://martinfowler.com/articles/continuousIntegration.html</a:t>
-            </a:r>
-          </a:p>
-          <a:p>
-            <a:pPr lvl="2" marL="167640" indent="-167640">
-              <a:spcBef>
-                <a:spcPts val="100"/>
-              </a:spcBef>
-              <a:spcAft>
-                <a:spcPts val="100"/>
-              </a:spcAft>
-              <a:buNone/>
-            </a:pPr>
-            <a:r>
-              <a:rPr sz="800" b="0">
-                <a:solidFill>
-                  <a:srgbClr val="000000"/>
-                </a:solidFill>
-                <a:latin typeface="맑은 고딕"/>
-                <a:ea typeface="맑은 고딕"/>
-              </a:rPr>
-              <a:t>33. </a:t>
-            </a:r>
-            <a:r>
-              <a:rPr sz="800" b="1">
-                <a:solidFill>
-                  <a:srgbClr val="000000"/>
-                </a:solidFill>
-                <a:latin typeface="맑은 고딕"/>
-                <a:ea typeface="맑은 고딕"/>
-              </a:rPr>
-              <a:t>[Gamma 외 1994]</a:t>
-            </a:r>
-            <a:r>
-              <a:rPr sz="800" b="0">
-                <a:solidFill>
-                  <a:srgbClr val="000000"/>
-                </a:solidFill>
-                <a:latin typeface="맑은 고딕"/>
-                <a:ea typeface="맑은 고딕"/>
-              </a:rPr>
-              <a:t>  Design Patterns: Elements of Reusable Object-Oriented Software, Erich Gamma·Richard Helm·Ralph Johnson·John Vlissides, Addison-Wesley, 1994</a:t>
-            </a:r>
-          </a:p>
-          <a:p>
-            <a:pPr lvl="2" marL="167640" indent="-167640">
-              <a:spcBef>
-                <a:spcPts val="100"/>
-              </a:spcBef>
-              <a:spcAft>
-                <a:spcPts val="100"/>
-              </a:spcAft>
-              <a:buNone/>
-            </a:pPr>
-            <a:r>
-              <a:rPr sz="800" b="0">
-                <a:solidFill>
-                  <a:srgbClr val="000000"/>
-                </a:solidFill>
-                <a:latin typeface="맑은 고딕"/>
-                <a:ea typeface="맑은 고딕"/>
-              </a:rPr>
-              <a:t>34. </a:t>
-            </a:r>
-            <a:r>
-              <a:rPr sz="800" b="1">
-                <a:solidFill>
-                  <a:srgbClr val="000000"/>
-                </a:solidFill>
-                <a:latin typeface="맑은 고딕"/>
-                <a:ea typeface="맑은 고딕"/>
-              </a:rPr>
-              <a:t>[Gamma 2005]</a:t>
-            </a:r>
-            <a:r>
-              <a:rPr sz="800" b="0">
-                <a:solidFill>
-                  <a:srgbClr val="000000"/>
-                </a:solidFill>
-                <a:latin typeface="맑은 고딕"/>
-                <a:ea typeface="맑은 고딕"/>
-              </a:rPr>
-              <a:t>  Design Principles from Design Patterns —</a:t>
-            </a:r>
-            <a:r>
-              <a:rPr sz="800" b="0">
-                <a:solidFill>
-                  <a:srgbClr val="000000"/>
-                </a:solidFill>
-                <a:latin typeface="맑은 고딕"/>
-                <a:ea typeface="맑은 고딕"/>
-              </a:rPr>
-              <a:t> A Conversation with Erich Gamma, Part III, Bill Venners, Artima, 2005, https://www.artima.com/articles/design-principles-from-design-patterns</a:t>
-            </a:r>
-          </a:p>
-          <a:p>
-            <a:pPr lvl="2" marL="167640" indent="-167640">
-              <a:spcBef>
-                <a:spcPts val="100"/>
-              </a:spcBef>
-              <a:spcAft>
-                <a:spcPts val="100"/>
-              </a:spcAft>
-              <a:buNone/>
-            </a:pPr>
-            <a:r>
-              <a:rPr sz="800" b="0">
-                <a:solidFill>
-                  <a:srgbClr val="000000"/>
-                </a:solidFill>
-                <a:latin typeface="맑은 고딕"/>
-                <a:ea typeface="맑은 고딕"/>
-              </a:rPr>
-              <a:t>35. </a:t>
-            </a:r>
-            <a:r>
-              <a:rPr sz="800" b="1">
-                <a:solidFill>
-                  <a:srgbClr val="000000"/>
-                </a:solidFill>
-                <a:latin typeface="맑은 고딕"/>
-                <a:ea typeface="맑은 고딕"/>
-              </a:rPr>
-              <a:t>[Gruber 1993]</a:t>
-            </a:r>
-            <a:r>
-              <a:rPr sz="800" b="0">
-                <a:solidFill>
-                  <a:srgbClr val="000000"/>
-                </a:solidFill>
-                <a:latin typeface="맑은 고딕"/>
-                <a:ea typeface="맑은 고딕"/>
-              </a:rPr>
-              <a:t>  A Translation Approach to Portable Ontology Specifications, Thomas R. Gruber, Knowledge Acquisition 5</a:t>
-            </a:r>
-            <a:r>
-              <a:rPr sz="800" b="0">
-                <a:solidFill>
-                  <a:srgbClr val="000000"/>
-                </a:solidFill>
-                <a:latin typeface="맑은 고딕"/>
-                <a:ea typeface="맑은 고딕"/>
-              </a:rPr>
-              <a:t>(2)</a:t>
-            </a:r>
-            <a:r>
-              <a:rPr sz="800" b="0">
-                <a:solidFill>
-                  <a:srgbClr val="000000"/>
-                </a:solidFill>
-                <a:latin typeface="맑은 고딕"/>
-                <a:ea typeface="맑은 고딕"/>
-              </a:rPr>
-              <a:t>, 1993</a:t>
-            </a:r>
-          </a:p>
-          <a:p>
-            <a:pPr lvl="2" marL="167640" indent="-167640">
-              <a:spcBef>
-                <a:spcPts val="100"/>
-              </a:spcBef>
-              <a:spcAft>
-                <a:spcPts val="100"/>
-              </a:spcAft>
-              <a:buNone/>
-            </a:pPr>
-            <a:r>
-              <a:rPr sz="800" b="0">
-                <a:solidFill>
-                  <a:srgbClr val="000000"/>
-                </a:solidFill>
-                <a:latin typeface="맑은 고딕"/>
-                <a:ea typeface="맑은 고딕"/>
-              </a:rPr>
-              <a:t>36. </a:t>
-            </a:r>
-            <a:r>
-              <a:rPr sz="800" b="1">
-                <a:solidFill>
-                  <a:srgbClr val="000000"/>
-                </a:solidFill>
-                <a:latin typeface="맑은 고딕"/>
-                <a:ea typeface="맑은 고딕"/>
-              </a:rPr>
-              <a:t>[Harel 1987]</a:t>
-            </a:r>
-            <a:r>
-              <a:rPr sz="800" b="0">
-                <a:solidFill>
-                  <a:srgbClr val="000000"/>
-                </a:solidFill>
-                <a:latin typeface="맑은 고딕"/>
-                <a:ea typeface="맑은 고딕"/>
-              </a:rPr>
-              <a:t>  Statecharts: A Visual Formalism for Complex Systems, David Harel, Science of Computer Programming, 1987</a:t>
-            </a:r>
-          </a:p>
-          <a:p>
-            <a:pPr lvl="2" marL="167640" indent="-167640">
-              <a:spcBef>
-                <a:spcPts val="100"/>
-              </a:spcBef>
-              <a:spcAft>
-                <a:spcPts val="100"/>
-              </a:spcAft>
-              <a:buNone/>
-            </a:pPr>
-            <a:r>
-              <a:rPr sz="800" b="0">
-                <a:solidFill>
-                  <a:srgbClr val="000000"/>
-                </a:solidFill>
-                <a:latin typeface="맑은 고딕"/>
-                <a:ea typeface="맑은 고딕"/>
-              </a:rPr>
-              <a:t>37. </a:t>
-            </a:r>
-            <a:r>
-              <a:rPr sz="800" b="1">
-                <a:solidFill>
-                  <a:srgbClr val="000000"/>
-                </a:solidFill>
-                <a:latin typeface="맑은 고딕"/>
-                <a:ea typeface="맑은 고딕"/>
-              </a:rPr>
-              <a:t>[Hoare 1981]</a:t>
-            </a:r>
-            <a:r>
-              <a:rPr sz="800" b="0">
-                <a:solidFill>
-                  <a:srgbClr val="000000"/>
-                </a:solidFill>
-                <a:latin typeface="맑은 고딕"/>
-                <a:ea typeface="맑은 고딕"/>
-              </a:rPr>
-              <a:t>  The Emperor's Old Clothes, C. A. R. Hoare, Communications of the ACM 24</a:t>
-            </a:r>
-            <a:r>
-              <a:rPr sz="800" b="0">
-                <a:solidFill>
-                  <a:srgbClr val="000000"/>
-                </a:solidFill>
-                <a:latin typeface="맑은 고딕"/>
-                <a:ea typeface="맑은 고딕"/>
-              </a:rPr>
-              <a:t>(2)</a:t>
-            </a:r>
-            <a:r>
-              <a:rPr sz="800" b="0">
-                <a:solidFill>
-                  <a:srgbClr val="000000"/>
-                </a:solidFill>
-                <a:latin typeface="맑은 고딕"/>
-                <a:ea typeface="맑은 고딕"/>
-              </a:rPr>
-              <a:t>, 1981</a:t>
-            </a:r>
-          </a:p>
-          <a:p>
-            <a:pPr lvl="2" marL="167640" indent="-167640">
-              <a:spcBef>
-                <a:spcPts val="100"/>
-              </a:spcBef>
-              <a:spcAft>
-                <a:spcPts val="100"/>
-              </a:spcAft>
-              <a:buNone/>
-            </a:pPr>
-            <a:r>
-              <a:rPr sz="800" b="0">
-                <a:solidFill>
-                  <a:srgbClr val="000000"/>
-                </a:solidFill>
-                <a:latin typeface="맑은 고딕"/>
-                <a:ea typeface="맑은 고딕"/>
-              </a:rPr>
-              <a:t>38. </a:t>
-            </a:r>
-            <a:r>
-              <a:rPr sz="800" b="1">
-                <a:solidFill>
-                  <a:srgbClr val="000000"/>
-                </a:solidFill>
-                <a:latin typeface="맑은 고딕"/>
-                <a:ea typeface="맑은 고딕"/>
-              </a:rPr>
-              <a:t>[Humble]</a:t>
-            </a:r>
-            <a:r>
-              <a:rPr sz="800" b="0">
-                <a:solidFill>
-                  <a:srgbClr val="000000"/>
-                </a:solidFill>
-                <a:latin typeface="맑은 고딕"/>
-                <a:ea typeface="맑은 고딕"/>
-              </a:rPr>
-              <a:t>  Principles, Jez Humble, continuousdelivery.com, https://continuousdelivery.com/principles/</a:t>
-            </a:r>
-          </a:p>
-          <a:p>
-            <a:pPr lvl="2" marL="167640" indent="-167640">
-              <a:spcBef>
-                <a:spcPts val="100"/>
-              </a:spcBef>
-              <a:spcAft>
-                <a:spcPts val="100"/>
-              </a:spcAft>
-              <a:buNone/>
-            </a:pPr>
-            <a:r>
-              <a:rPr sz="800" b="0">
-                <a:solidFill>
-                  <a:srgbClr val="000000"/>
-                </a:solidFill>
-                <a:latin typeface="맑은 고딕"/>
-                <a:ea typeface="맑은 고딕"/>
-              </a:rPr>
-              <a:t>39. </a:t>
-            </a:r>
-            <a:r>
-              <a:rPr sz="800" b="1">
-                <a:solidFill>
-                  <a:srgbClr val="000000"/>
-                </a:solidFill>
-                <a:latin typeface="맑은 고딕"/>
-                <a:ea typeface="맑은 고딕"/>
-              </a:rPr>
-              <a:t>[IIBA 2017]</a:t>
-            </a:r>
-            <a:r>
-              <a:rPr sz="800" b="0">
-                <a:solidFill>
-                  <a:srgbClr val="000000"/>
-                </a:solidFill>
-                <a:latin typeface="맑은 고딕"/>
-                <a:ea typeface="맑은 고딕"/>
-              </a:rPr>
-              <a:t>  Global Business Analysis Core Standard, International Institute of Business Analysis, 2017, https://www.iiba.org/globalassets/standards-and-resources/core-standard/iiba-core-standard.pdf</a:t>
-            </a:r>
-          </a:p>
-          <a:p>
-            <a:pPr lvl="2" marL="167640" indent="-167640">
-              <a:spcBef>
-                <a:spcPts val="100"/>
-              </a:spcBef>
-              <a:spcAft>
-                <a:spcPts val="100"/>
-              </a:spcAft>
-              <a:buNone/>
-            </a:pPr>
-            <a:r>
-              <a:rPr sz="800" b="0">
-                <a:solidFill>
-                  <a:srgbClr val="000000"/>
-                </a:solidFill>
-                <a:latin typeface="맑은 고딕"/>
-                <a:ea typeface="맑은 고딕"/>
-              </a:rPr>
-              <a:t>40. </a:t>
-            </a:r>
-            <a:r>
-              <a:rPr sz="800" b="1">
-                <a:solidFill>
-                  <a:srgbClr val="000000"/>
-                </a:solidFill>
-                <a:latin typeface="맑은 고딕"/>
-                <a:ea typeface="맑은 고딕"/>
-              </a:rPr>
-              <a:t>[IIBA 2022]</a:t>
-            </a:r>
-            <a:r>
-              <a:rPr sz="800" b="0">
-                <a:solidFill>
-                  <a:srgbClr val="000000"/>
-                </a:solidFill>
-                <a:latin typeface="맑은 고딕"/>
-                <a:ea typeface="맑은 고딕"/>
-              </a:rPr>
-              <a:t>  The Business Analysis Standard, IIBA, 2022</a:t>
-            </a:r>
-          </a:p>
-          <a:p>
-            <a:pPr lvl="2" marL="167640" indent="-167640">
-              <a:spcBef>
-                <a:spcPts val="100"/>
-              </a:spcBef>
-              <a:spcAft>
-                <a:spcPts val="100"/>
-              </a:spcAft>
-              <a:buNone/>
-            </a:pPr>
-            <a:r>
-              <a:rPr sz="800" b="0">
-                <a:solidFill>
-                  <a:srgbClr val="000000"/>
-                </a:solidFill>
-                <a:latin typeface="맑은 고딕"/>
-                <a:ea typeface="맑은 고딕"/>
-              </a:rPr>
-              <a:t>41. </a:t>
-            </a:r>
-            <a:r>
-              <a:rPr sz="800" b="1">
-                <a:solidFill>
-                  <a:srgbClr val="000000"/>
-                </a:solidFill>
-                <a:latin typeface="맑은 고딕"/>
-                <a:ea typeface="맑은 고딕"/>
-              </a:rPr>
-              <a:t>[Jacobson 1992]</a:t>
-            </a:r>
-            <a:r>
-              <a:rPr sz="800" b="0">
-                <a:solidFill>
-                  <a:srgbClr val="000000"/>
-                </a:solidFill>
-                <a:latin typeface="맑은 고딕"/>
-                <a:ea typeface="맑은 고딕"/>
-              </a:rPr>
-              <a:t>  Object-Oriented Software Engineering: A Use Case Driven Approach, Ivar Jacobson 외, Addison-Wesley, 1992</a:t>
             </a:r>
           </a:p>
         </p:txBody>
@@ -3973,6 +3636,343 @@
                 <a:latin typeface="맑은 고딕"/>
                 <a:ea typeface="맑은 고딕"/>
               </a:rPr>
+              <a:t>35. </a:t>
+            </a:r>
+            <a:r>
+              <a:rPr sz="800" b="1">
+                <a:solidFill>
+                  <a:srgbClr val="000000"/>
+                </a:solidFill>
+                <a:latin typeface="맑은 고딕"/>
+                <a:ea typeface="맑은 고딕"/>
+              </a:rPr>
+              <a:t>[Gamma 외 1994]</a:t>
+            </a:r>
+            <a:r>
+              <a:rPr sz="800" b="0">
+                <a:solidFill>
+                  <a:srgbClr val="000000"/>
+                </a:solidFill>
+                <a:latin typeface="맑은 고딕"/>
+                <a:ea typeface="맑은 고딕"/>
+              </a:rPr>
+              <a:t>  Design Patterns: Elements of Reusable Object-Oriented Software, Erich Gamma·Richard Helm·Ralph Johnson·John Vlissides, Addison-Wesley, 1994</a:t>
+            </a:r>
+          </a:p>
+          <a:p>
+            <a:pPr lvl="2" marL="167640" indent="-167640">
+              <a:spcBef>
+                <a:spcPts val="100"/>
+              </a:spcBef>
+              <a:spcAft>
+                <a:spcPts val="100"/>
+              </a:spcAft>
+              <a:buNone/>
+            </a:pPr>
+            <a:r>
+              <a:rPr sz="800" b="0">
+                <a:solidFill>
+                  <a:srgbClr val="000000"/>
+                </a:solidFill>
+                <a:latin typeface="맑은 고딕"/>
+                <a:ea typeface="맑은 고딕"/>
+              </a:rPr>
+              <a:t>36. </a:t>
+            </a:r>
+            <a:r>
+              <a:rPr sz="800" b="1">
+                <a:solidFill>
+                  <a:srgbClr val="000000"/>
+                </a:solidFill>
+                <a:latin typeface="맑은 고딕"/>
+                <a:ea typeface="맑은 고딕"/>
+              </a:rPr>
+              <a:t>[Gamma 2005]</a:t>
+            </a:r>
+            <a:r>
+              <a:rPr sz="800" b="0">
+                <a:solidFill>
+                  <a:srgbClr val="000000"/>
+                </a:solidFill>
+                <a:latin typeface="맑은 고딕"/>
+                <a:ea typeface="맑은 고딕"/>
+              </a:rPr>
+              <a:t>  Design Principles from Design Patterns —</a:t>
+            </a:r>
+            <a:r>
+              <a:rPr sz="800" b="0">
+                <a:solidFill>
+                  <a:srgbClr val="000000"/>
+                </a:solidFill>
+                <a:latin typeface="맑은 고딕"/>
+                <a:ea typeface="맑은 고딕"/>
+              </a:rPr>
+              <a:t> A Conversation with Erich Gamma, Part III, Bill Venners, Artima, 2005, https://www.artima.com/articles/design-principles-from-design-patterns</a:t>
+            </a:r>
+          </a:p>
+          <a:p>
+            <a:pPr lvl="2" marL="167640" indent="-167640">
+              <a:spcBef>
+                <a:spcPts val="100"/>
+              </a:spcBef>
+              <a:spcAft>
+                <a:spcPts val="100"/>
+              </a:spcAft>
+              <a:buNone/>
+            </a:pPr>
+            <a:r>
+              <a:rPr sz="800" b="0">
+                <a:solidFill>
+                  <a:srgbClr val="000000"/>
+                </a:solidFill>
+                <a:latin typeface="맑은 고딕"/>
+                <a:ea typeface="맑은 고딕"/>
+              </a:rPr>
+              <a:t>37. </a:t>
+            </a:r>
+            <a:r>
+              <a:rPr sz="800" b="1">
+                <a:solidFill>
+                  <a:srgbClr val="000000"/>
+                </a:solidFill>
+                <a:latin typeface="맑은 고딕"/>
+                <a:ea typeface="맑은 고딕"/>
+              </a:rPr>
+              <a:t>[Gruber 1993]</a:t>
+            </a:r>
+            <a:r>
+              <a:rPr sz="800" b="0">
+                <a:solidFill>
+                  <a:srgbClr val="000000"/>
+                </a:solidFill>
+                <a:latin typeface="맑은 고딕"/>
+                <a:ea typeface="맑은 고딕"/>
+              </a:rPr>
+              <a:t>  A Translation Approach to Portable Ontology Specifications, Thomas R. Gruber, Knowledge Acquisition 5</a:t>
+            </a:r>
+            <a:r>
+              <a:rPr sz="800" b="0">
+                <a:solidFill>
+                  <a:srgbClr val="000000"/>
+                </a:solidFill>
+                <a:latin typeface="맑은 고딕"/>
+                <a:ea typeface="맑은 고딕"/>
+              </a:rPr>
+              <a:t>(2)</a:t>
+            </a:r>
+            <a:r>
+              <a:rPr sz="800" b="0">
+                <a:solidFill>
+                  <a:srgbClr val="000000"/>
+                </a:solidFill>
+                <a:latin typeface="맑은 고딕"/>
+                <a:ea typeface="맑은 고딕"/>
+              </a:rPr>
+              <a:t>, 1993</a:t>
+            </a:r>
+          </a:p>
+          <a:p>
+            <a:pPr lvl="2" marL="167640" indent="-167640">
+              <a:spcBef>
+                <a:spcPts val="100"/>
+              </a:spcBef>
+              <a:spcAft>
+                <a:spcPts val="100"/>
+              </a:spcAft>
+              <a:buNone/>
+            </a:pPr>
+            <a:r>
+              <a:rPr sz="800" b="0">
+                <a:solidFill>
+                  <a:srgbClr val="000000"/>
+                </a:solidFill>
+                <a:latin typeface="맑은 고딕"/>
+                <a:ea typeface="맑은 고딕"/>
+              </a:rPr>
+              <a:t>38. </a:t>
+            </a:r>
+            <a:r>
+              <a:rPr sz="800" b="1">
+                <a:solidFill>
+                  <a:srgbClr val="000000"/>
+                </a:solidFill>
+                <a:latin typeface="맑은 고딕"/>
+                <a:ea typeface="맑은 고딕"/>
+              </a:rPr>
+              <a:t>[Harel 1987]</a:t>
+            </a:r>
+            <a:r>
+              <a:rPr sz="800" b="0">
+                <a:solidFill>
+                  <a:srgbClr val="000000"/>
+                </a:solidFill>
+                <a:latin typeface="맑은 고딕"/>
+                <a:ea typeface="맑은 고딕"/>
+              </a:rPr>
+              <a:t>  Statecharts: A Visual Formalism for Complex Systems, David Harel, Science of Computer Programming, 1987</a:t>
+            </a:r>
+          </a:p>
+          <a:p>
+            <a:pPr lvl="2" marL="167640" indent="-167640">
+              <a:spcBef>
+                <a:spcPts val="100"/>
+              </a:spcBef>
+              <a:spcAft>
+                <a:spcPts val="100"/>
+              </a:spcAft>
+              <a:buNone/>
+            </a:pPr>
+            <a:r>
+              <a:rPr sz="800" b="0">
+                <a:solidFill>
+                  <a:srgbClr val="000000"/>
+                </a:solidFill>
+                <a:latin typeface="맑은 고딕"/>
+                <a:ea typeface="맑은 고딕"/>
+              </a:rPr>
+              <a:t>39. </a:t>
+            </a:r>
+            <a:r>
+              <a:rPr sz="800" b="1">
+                <a:solidFill>
+                  <a:srgbClr val="000000"/>
+                </a:solidFill>
+                <a:latin typeface="맑은 고딕"/>
+                <a:ea typeface="맑은 고딕"/>
+              </a:rPr>
+              <a:t>[Hoare 1981]</a:t>
+            </a:r>
+            <a:r>
+              <a:rPr sz="800" b="0">
+                <a:solidFill>
+                  <a:srgbClr val="000000"/>
+                </a:solidFill>
+                <a:latin typeface="맑은 고딕"/>
+                <a:ea typeface="맑은 고딕"/>
+              </a:rPr>
+              <a:t>  The Emperor's Old Clothes, C. A. R. Hoare, Communications of the ACM 24</a:t>
+            </a:r>
+            <a:r>
+              <a:rPr sz="800" b="0">
+                <a:solidFill>
+                  <a:srgbClr val="000000"/>
+                </a:solidFill>
+                <a:latin typeface="맑은 고딕"/>
+                <a:ea typeface="맑은 고딕"/>
+              </a:rPr>
+              <a:t>(2)</a:t>
+            </a:r>
+            <a:r>
+              <a:rPr sz="800" b="0">
+                <a:solidFill>
+                  <a:srgbClr val="000000"/>
+                </a:solidFill>
+                <a:latin typeface="맑은 고딕"/>
+                <a:ea typeface="맑은 고딕"/>
+              </a:rPr>
+              <a:t>, 1981</a:t>
+            </a:r>
+          </a:p>
+          <a:p>
+            <a:pPr lvl="2" marL="167640" indent="-167640">
+              <a:spcBef>
+                <a:spcPts val="100"/>
+              </a:spcBef>
+              <a:spcAft>
+                <a:spcPts val="100"/>
+              </a:spcAft>
+              <a:buNone/>
+            </a:pPr>
+            <a:r>
+              <a:rPr sz="800" b="0">
+                <a:solidFill>
+                  <a:srgbClr val="000000"/>
+                </a:solidFill>
+                <a:latin typeface="맑은 고딕"/>
+                <a:ea typeface="맑은 고딕"/>
+              </a:rPr>
+              <a:t>40. </a:t>
+            </a:r>
+            <a:r>
+              <a:rPr sz="800" b="1">
+                <a:solidFill>
+                  <a:srgbClr val="000000"/>
+                </a:solidFill>
+                <a:latin typeface="맑은 고딕"/>
+                <a:ea typeface="맑은 고딕"/>
+              </a:rPr>
+              <a:t>[Humble]</a:t>
+            </a:r>
+            <a:r>
+              <a:rPr sz="800" b="0">
+                <a:solidFill>
+                  <a:srgbClr val="000000"/>
+                </a:solidFill>
+                <a:latin typeface="맑은 고딕"/>
+                <a:ea typeface="맑은 고딕"/>
+              </a:rPr>
+              <a:t>  Principles, Jez Humble, continuousdelivery.com, https://continuousdelivery.com/principles/</a:t>
+            </a:r>
+          </a:p>
+          <a:p>
+            <a:pPr lvl="2" marL="167640" indent="-167640">
+              <a:spcBef>
+                <a:spcPts val="100"/>
+              </a:spcBef>
+              <a:spcAft>
+                <a:spcPts val="100"/>
+              </a:spcAft>
+              <a:buNone/>
+            </a:pPr>
+            <a:r>
+              <a:rPr sz="800" b="0">
+                <a:solidFill>
+                  <a:srgbClr val="000000"/>
+                </a:solidFill>
+                <a:latin typeface="맑은 고딕"/>
+                <a:ea typeface="맑은 고딕"/>
+              </a:rPr>
+              <a:t>41. </a:t>
+            </a:r>
+            <a:r>
+              <a:rPr sz="800" b="1">
+                <a:solidFill>
+                  <a:srgbClr val="000000"/>
+                </a:solidFill>
+                <a:latin typeface="맑은 고딕"/>
+                <a:ea typeface="맑은 고딕"/>
+              </a:rPr>
+              <a:t>[IIBA 2017]</a:t>
+            </a:r>
+            <a:r>
+              <a:rPr sz="800" b="0">
+                <a:solidFill>
+                  <a:srgbClr val="000000"/>
+                </a:solidFill>
+                <a:latin typeface="맑은 고딕"/>
+                <a:ea typeface="맑은 고딕"/>
+              </a:rPr>
+              <a:t>  Global Business Analysis Core Standard, International Institute of Business Analysis, 2017, https://www.iiba.org/globalassets/standards-and-resources/core-standard/iiba-core-standard.pdf</a:t>
+            </a:r>
+          </a:p>
+          <a:p>
+            <a:pPr lvl="2" marL="167640" indent="-167640">
+              <a:spcBef>
+                <a:spcPts val="100"/>
+              </a:spcBef>
+              <a:spcAft>
+                <a:spcPts val="100"/>
+              </a:spcAft>
+              <a:buNone/>
+            </a:pPr>
+            <a:r>
+              <a:rPr sz="800" b="0">
+                <a:solidFill>
+                  <a:srgbClr val="000000"/>
+                </a:solidFill>
+                <a:latin typeface="맑은 고딕"/>
+                <a:ea typeface="맑은 고딕"/>
+              </a:rPr>
               <a:t>42. </a:t>
             </a:r>
             <a:r>
@@ -3983,6 +3983,88 @@
                 <a:latin typeface="맑은 고딕"/>
                 <a:ea typeface="맑은 고딕"/>
               </a:rPr>
+              <a:t>[IIBA 2022]</a:t>
+            </a:r>
+            <a:r>
+              <a:rPr sz="800" b="0">
+                <a:solidFill>
+                  <a:srgbClr val="000000"/>
+                </a:solidFill>
+                <a:latin typeface="맑은 고딕"/>
+                <a:ea typeface="맑은 고딕"/>
+              </a:rPr>
+              <a:t>  The Business Analysis Standard, IIBA, 2022</a:t>
+            </a:r>
+          </a:p>
+          <a:p>
+            <a:pPr lvl="2" marL="167640" indent="-167640">
+              <a:spcBef>
+                <a:spcPts val="100"/>
+              </a:spcBef>
+              <a:spcAft>
+                <a:spcPts val="100"/>
+              </a:spcAft>
+              <a:buNone/>
+            </a:pPr>
+            <a:r>
+              <a:rPr sz="800" b="0">
+                <a:solidFill>
+                  <a:srgbClr val="000000"/>
+                </a:solidFill>
+                <a:latin typeface="맑은 고딕"/>
+                <a:ea typeface="맑은 고딕"/>
+              </a:rPr>
+              <a:t>43. </a:t>
+            </a:r>
+            <a:r>
+              <a:rPr sz="800" b="1">
+                <a:solidFill>
+                  <a:srgbClr val="000000"/>
+                </a:solidFill>
+                <a:latin typeface="맑은 고딕"/>
+                <a:ea typeface="맑은 고딕"/>
+              </a:rPr>
+              <a:t>[Jacobson 1992]</a:t>
+            </a:r>
+            <a:r>
+              <a:rPr sz="800" b="0">
+                <a:solidFill>
+                  <a:srgbClr val="000000"/>
+                </a:solidFill>
+                <a:latin typeface="맑은 고딕"/>
+                <a:ea typeface="맑은 고딕"/>
+              </a:rPr>
+              <a:t>  Object-Oriented Software Engineering: A Use Case Driven Approach, Ivar Jacobson 외, Addison-Wesley, 1992</a:t>
+            </a:r>
+          </a:p>
+          <a:p>
+            <a:pPr lvl="2" marL="167640" indent="-167640">
+              <a:spcBef>
+                <a:spcPts val="100"/>
+              </a:spcBef>
+              <a:spcAft>
+                <a:spcPts val="100"/>
+              </a:spcAft>
+              <a:buNone/>
+            </a:pPr>
+            <a:r>
+              <a:rPr sz="800" b="0">
+                <a:solidFill>
+                  <a:srgbClr val="000000"/>
+                </a:solidFill>
+                <a:latin typeface="맑은 고딕"/>
+                <a:ea typeface="맑은 고딕"/>
+              </a:rPr>
+              <a:t>44. </a:t>
+            </a:r>
+            <a:r>
+              <a:rPr sz="800" b="1">
+                <a:solidFill>
+                  <a:srgbClr val="000000"/>
+                </a:solidFill>
+                <a:latin typeface="맑은 고딕"/>
+                <a:ea typeface="맑은 고딕"/>
+              </a:rPr>
               <a:t>[Jeffries 2001]</a:t>
             </a:r>
             <a:r>
@@ -3993,7 +4075,7 @@
                 <a:latin typeface="맑은 고딕"/>
                 <a:ea typeface="맑은 고딕"/>
               </a:rPr>
-              <a:t>  Essential XP: Card, Conversation, Confirmation, Ron Jeffries, 2001</a:t>
+              <a:t>  Essential XP: Card, Conversation, Confirmation, Ron Jeffries, 2001, https://ronjeffries.com/xprog/articles/expcardconversationconfirmation/</a:t>
             </a:r>
           </a:p>
           <a:p>
@@ -4014,7 +4096,7 @@
                 <a:latin typeface="맑은 고딕"/>
                 <a:ea typeface="맑은 고딕"/>
               </a:rPr>
-              <a:t>43. </a:t>
+              <a:t>45. </a:t>
             </a:r>
             <a:r>
               <a:rPr sz="800" b="1">
@@ -4075,7 +4157,7 @@
                 <a:latin typeface="맑은 고딕"/>
                 <a:ea typeface="맑은 고딕"/>
               </a:rPr>
-              <a:t>44. </a:t>
+              <a:t>46. </a:t>
             </a:r>
             <a:r>
               <a:rPr sz="800" b="1">
@@ -4136,7 +4218,7 @@
                 <a:latin typeface="맑은 고딕"/>
                 <a:ea typeface="맑은 고딕"/>
               </a:rPr>
-              <a:t>45. </a:t>
+              <a:t>47. </a:t>
             </a:r>
             <a:r>
               <a:rPr sz="800" b="1">
@@ -4177,7 +4259,7 @@
                 <a:latin typeface="맑은 고딕"/>
                 <a:ea typeface="맑은 고딕"/>
               </a:rPr>
-              <a:t>46. </a:t>
+              <a:t>48. </a:t>
             </a:r>
             <a:r>
               <a:rPr sz="800" b="1">
@@ -4218,7 +4300,7 @@
                 <a:latin typeface="맑은 고딕"/>
                 <a:ea typeface="맑은 고딕"/>
               </a:rPr>
-              <a:t>47. </a:t>
+              <a:t>49. </a:t>
             </a:r>
             <a:r>
               <a:rPr sz="800" b="1">
@@ -4259,7 +4341,7 @@
                 <a:latin typeface="맑은 고딕"/>
                 <a:ea typeface="맑은 고딕"/>
               </a:rPr>
-              <a:t>48. </a:t>
+              <a:t>50. </a:t>
             </a:r>
             <a:r>
               <a:rPr sz="800" b="1">
@@ -4300,7 +4382,7 @@
                 <a:latin typeface="맑은 고딕"/>
                 <a:ea typeface="맑은 고딕"/>
               </a:rPr>
-              <a:t>49. </a:t>
+              <a:t>51. </a:t>
             </a:r>
             <a:r>
               <a:rPr sz="800" b="1">
@@ -4321,190 +4403,6 @@
                 <a:ea typeface="맑은 고딕"/>
               </a:rPr>
               <a:t>  Design Principles and Design Patterns, Robert C. Martin, 2000</a:t>
-            </a:r>
-          </a:p>
-          <a:p>
-            <a:pPr lvl="2" marL="167640" indent="-167640">
-              <a:spcBef>
-                <a:spcPts val="100"/>
-              </a:spcBef>
-              <a:spcAft>
-                <a:spcPts val="100"/>
-              </a:spcAft>
-              <a:buNone/>
-            </a:pPr>
-            <a:r>
-              <a:rPr sz="800" b="0">
-                <a:solidFill>
-                  <a:srgbClr val="000000"/>
-                </a:solidFill>
-                <a:latin typeface="맑은 고딕"/>
-                <a:ea typeface="맑은 고딕"/>
-              </a:rPr>
-              <a:t>50. </a:t>
-            </a:r>
-            <a:r>
-              <a:rPr sz="800" b="1">
-                <a:solidFill>
-                  <a:srgbClr val="000000"/>
-                </a:solidFill>
-                <a:latin typeface="맑은 고딕"/>
-                <a:ea typeface="맑은 고딕"/>
-              </a:rPr>
-              <a:t>[Martin 2014]</a:t>
-            </a:r>
-            <a:r>
-              <a:rPr sz="800" b="0">
-                <a:solidFill>
-                  <a:srgbClr val="000000"/>
-                </a:solidFill>
-                <a:latin typeface="맑은 고딕"/>
-                <a:ea typeface="맑은 고딕"/>
-              </a:rPr>
-              <a:t>  The Single Responsibility Principle, Robert C. Martin, The Clean Code Blog, 2014, https://blog.cleancoder.com/uncle-bob/2014/05/08/SingleReponsibilityPrinciple.html</a:t>
-            </a:r>
-          </a:p>
-          <a:p>
-            <a:pPr lvl="2" marL="167640" indent="-167640">
-              <a:spcBef>
-                <a:spcPts val="100"/>
-              </a:spcBef>
-              <a:spcAft>
-                <a:spcPts val="100"/>
-              </a:spcAft>
-              <a:buNone/>
-            </a:pPr>
-            <a:r>
-              <a:rPr sz="800" b="0">
-                <a:solidFill>
-                  <a:srgbClr val="000000"/>
-                </a:solidFill>
-                <a:latin typeface="맑은 고딕"/>
-                <a:ea typeface="맑은 고딕"/>
-              </a:rPr>
-              <a:t>51. </a:t>
-            </a:r>
-            <a:r>
-              <a:rPr sz="800" b="1">
-                <a:solidFill>
-                  <a:srgbClr val="000000"/>
-                </a:solidFill>
-                <a:latin typeface="맑은 고딕"/>
-                <a:ea typeface="맑은 고딕"/>
-              </a:rPr>
-              <a:t>[Martin 2018]</a:t>
-            </a:r>
-            <a:r>
-              <a:rPr sz="800" b="0">
-                <a:solidFill>
-                  <a:srgbClr val="000000"/>
-                </a:solidFill>
-                <a:latin typeface="맑은 고딕"/>
-                <a:ea typeface="맑은 고딕"/>
-              </a:rPr>
-              <a:t>  Clean Architecture, Robert C. Martin, Prentice Hall, 2018</a:t>
-            </a:r>
-          </a:p>
-          <a:p>
-            <a:pPr lvl="2" marL="167640" indent="-167640">
-              <a:spcBef>
-                <a:spcPts val="100"/>
-              </a:spcBef>
-              <a:spcAft>
-                <a:spcPts val="100"/>
-              </a:spcAft>
-              <a:buNone/>
-            </a:pPr>
-            <a:r>
-              <a:rPr sz="800" b="0">
-                <a:solidFill>
-                  <a:srgbClr val="000000"/>
-                </a:solidFill>
-                <a:latin typeface="맑은 고딕"/>
-                <a:ea typeface="맑은 고딕"/>
-              </a:rPr>
-              <a:t>52. </a:t>
-            </a:r>
-            <a:r>
-              <a:rPr sz="800" b="1">
-                <a:solidFill>
-                  <a:srgbClr val="000000"/>
-                </a:solidFill>
-                <a:latin typeface="맑은 고딕"/>
-                <a:ea typeface="맑은 고딕"/>
-              </a:rPr>
-              <a:t>[Meyer 1992]</a:t>
-            </a:r>
-            <a:r>
-              <a:rPr sz="800" b="0">
-                <a:solidFill>
-                  <a:srgbClr val="000000"/>
-                </a:solidFill>
-                <a:latin typeface="맑은 고딕"/>
-                <a:ea typeface="맑은 고딕"/>
-              </a:rPr>
-              <a:t>  Applying "Design by Contract", Bertrand Meyer, IEEE Computer 25</a:t>
-            </a:r>
-            <a:r>
-              <a:rPr sz="800" b="0">
-                <a:solidFill>
-                  <a:srgbClr val="000000"/>
-                </a:solidFill>
-                <a:latin typeface="맑은 고딕"/>
-                <a:ea typeface="맑은 고딕"/>
-              </a:rPr>
-              <a:t>(10)</a:t>
-            </a:r>
-            <a:r>
-              <a:rPr sz="800" b="0">
-                <a:solidFill>
-                  <a:srgbClr val="000000"/>
-                </a:solidFill>
-                <a:latin typeface="맑은 고딕"/>
-                <a:ea typeface="맑은 고딕"/>
-              </a:rPr>
-              <a:t>, 1992</a:t>
-            </a:r>
-          </a:p>
-          <a:p>
-            <a:pPr lvl="2" marL="167640" indent="-167640">
-              <a:spcBef>
-                <a:spcPts val="100"/>
-              </a:spcBef>
-              <a:spcAft>
-                <a:spcPts val="100"/>
-              </a:spcAft>
-              <a:buNone/>
-            </a:pPr>
-            <a:r>
-              <a:rPr sz="800" b="0">
-                <a:solidFill>
-                  <a:srgbClr val="000000"/>
-                </a:solidFill>
-                <a:latin typeface="맑은 고딕"/>
-                <a:ea typeface="맑은 고딕"/>
-              </a:rPr>
-              <a:t>53. </a:t>
-            </a:r>
-            <a:r>
-              <a:rPr sz="800" b="1">
-                <a:solidFill>
-                  <a:srgbClr val="000000"/>
-                </a:solidFill>
-                <a:latin typeface="맑은 고딕"/>
-                <a:ea typeface="맑은 고딕"/>
-              </a:rPr>
-              <a:t>[Meyer 1997]</a:t>
-            </a:r>
-            <a:r>
-              <a:rPr sz="800" b="0">
-                <a:solidFill>
-                  <a:srgbClr val="000000"/>
-                </a:solidFill>
-                <a:latin typeface="맑은 고딕"/>
-                <a:ea typeface="맑은 고딕"/>
-              </a:rPr>
-              <a:t>  Object-Oriented Software Construction, 2nd ed., Bertrand Meyer, Prentice Hall, 1997</a:t>
             </a:r>
           </a:p>
         </p:txBody>
@@ -4554,6 +4452,88 @@
                 <a:latin typeface="맑은 고딕"/>
                 <a:ea typeface="맑은 고딕"/>
               </a:rPr>
+              <a:t>52. </a:t>
+            </a:r>
+            <a:r>
+              <a:rPr sz="800" b="1">
+                <a:solidFill>
+                  <a:srgbClr val="000000"/>
+                </a:solidFill>
+                <a:latin typeface="맑은 고딕"/>
+                <a:ea typeface="맑은 고딕"/>
+              </a:rPr>
+              <a:t>[Martin 2014]</a:t>
+            </a:r>
+            <a:r>
+              <a:rPr sz="800" b="0">
+                <a:solidFill>
+                  <a:srgbClr val="000000"/>
+                </a:solidFill>
+                <a:latin typeface="맑은 고딕"/>
+                <a:ea typeface="맑은 고딕"/>
+              </a:rPr>
+              <a:t>  The Single Responsibility Principle, Robert C. Martin, The Clean Code Blog, 2014, https://blog.cleancoder.com/uncle-bob/2014/05/08/SingleReponsibilityPrinciple.html</a:t>
+            </a:r>
+          </a:p>
+          <a:p>
+            <a:pPr lvl="2" marL="167640" indent="-167640">
+              <a:spcBef>
+                <a:spcPts val="100"/>
+              </a:spcBef>
+              <a:spcAft>
+                <a:spcPts val="100"/>
+              </a:spcAft>
+              <a:buNone/>
+            </a:pPr>
+            <a:r>
+              <a:rPr sz="800" b="0">
+                <a:solidFill>
+                  <a:srgbClr val="000000"/>
+                </a:solidFill>
+                <a:latin typeface="맑은 고딕"/>
+                <a:ea typeface="맑은 고딕"/>
+              </a:rPr>
+              <a:t>53. </a:t>
+            </a:r>
+            <a:r>
+              <a:rPr sz="800" b="1">
+                <a:solidFill>
+                  <a:srgbClr val="000000"/>
+                </a:solidFill>
+                <a:latin typeface="맑은 고딕"/>
+                <a:ea typeface="맑은 고딕"/>
+              </a:rPr>
+              <a:t>[Martin 2018]</a:t>
+            </a:r>
+            <a:r>
+              <a:rPr sz="800" b="0">
+                <a:solidFill>
+                  <a:srgbClr val="000000"/>
+                </a:solidFill>
+                <a:latin typeface="맑은 고딕"/>
+                <a:ea typeface="맑은 고딕"/>
+              </a:rPr>
+              <a:t>  Clean Architecture, Robert C. Martin, Prentice Hall, 2018</a:t>
+            </a:r>
+          </a:p>
+          <a:p>
+            <a:pPr lvl="2" marL="167640" indent="-167640">
+              <a:spcBef>
+                <a:spcPts val="100"/>
+              </a:spcBef>
+              <a:spcAft>
+                <a:spcPts val="100"/>
+              </a:spcAft>
+              <a:buNone/>
+            </a:pPr>
+            <a:r>
+              <a:rPr sz="800" b="0">
+                <a:solidFill>
+                  <a:srgbClr val="000000"/>
+                </a:solidFill>
+                <a:latin typeface="맑은 고딕"/>
+                <a:ea typeface="맑은 고딕"/>
+              </a:rPr>
               <a:t>54. </a:t>
             </a:r>
             <a:r>
@@ -4564,6 +4544,149 @@
                 <a:latin typeface="맑은 고딕"/>
                 <a:ea typeface="맑은 고딕"/>
               </a:rPr>
+              <a:t>[Meyer 1992]</a:t>
+            </a:r>
+            <a:r>
+              <a:rPr sz="800" b="0">
+                <a:solidFill>
+                  <a:srgbClr val="000000"/>
+                </a:solidFill>
+                <a:latin typeface="맑은 고딕"/>
+                <a:ea typeface="맑은 고딕"/>
+              </a:rPr>
+              <a:t>  Applying "Design by Contract", Bertrand Meyer, IEEE Computer 25</a:t>
+            </a:r>
+            <a:r>
+              <a:rPr sz="800" b="0">
+                <a:solidFill>
+                  <a:srgbClr val="000000"/>
+                </a:solidFill>
+                <a:latin typeface="맑은 고딕"/>
+                <a:ea typeface="맑은 고딕"/>
+              </a:rPr>
+              <a:t>(10)</a:t>
+            </a:r>
+            <a:r>
+              <a:rPr sz="800" b="0">
+                <a:solidFill>
+                  <a:srgbClr val="000000"/>
+                </a:solidFill>
+                <a:latin typeface="맑은 고딕"/>
+                <a:ea typeface="맑은 고딕"/>
+              </a:rPr>
+              <a:t>, 1992, https://se.inf.ethz.ch/~meyer/publications/computer/contract.pdf</a:t>
+            </a:r>
+          </a:p>
+          <a:p>
+            <a:pPr lvl="2" marL="167640" indent="-167640">
+              <a:spcBef>
+                <a:spcPts val="100"/>
+              </a:spcBef>
+              <a:spcAft>
+                <a:spcPts val="100"/>
+              </a:spcAft>
+              <a:buNone/>
+            </a:pPr>
+            <a:r>
+              <a:rPr sz="800" b="0">
+                <a:solidFill>
+                  <a:srgbClr val="000000"/>
+                </a:solidFill>
+                <a:latin typeface="맑은 고딕"/>
+                <a:ea typeface="맑은 고딕"/>
+              </a:rPr>
+              <a:t>55. </a:t>
+            </a:r>
+            <a:r>
+              <a:rPr sz="800" b="1">
+                <a:solidFill>
+                  <a:srgbClr val="000000"/>
+                </a:solidFill>
+                <a:latin typeface="맑은 고딕"/>
+                <a:ea typeface="맑은 고딕"/>
+              </a:rPr>
+              <a:t>[Meyer 1997]</a:t>
+            </a:r>
+            <a:r>
+              <a:rPr sz="800" b="0">
+                <a:solidFill>
+                  <a:srgbClr val="000000"/>
+                </a:solidFill>
+                <a:latin typeface="맑은 고딕"/>
+                <a:ea typeface="맑은 고딕"/>
+              </a:rPr>
+              <a:t>  Object-Oriented Software Construction, 2nd ed., Bertrand Meyer, Prentice Hall, 1997</a:t>
+            </a:r>
+          </a:p>
+          <a:p>
+            <a:pPr lvl="2" marL="167640" indent="-167640">
+              <a:spcBef>
+                <a:spcPts val="100"/>
+              </a:spcBef>
+              <a:spcAft>
+                <a:spcPts val="100"/>
+              </a:spcAft>
+              <a:buNone/>
+            </a:pPr>
+            <a:r>
+              <a:rPr sz="800" b="0">
+                <a:solidFill>
+                  <a:srgbClr val="000000"/>
+                </a:solidFill>
+                <a:latin typeface="맑은 고딕"/>
+                <a:ea typeface="맑은 고딕"/>
+              </a:rPr>
+              <a:t>56. </a:t>
+            </a:r>
+            <a:r>
+              <a:rPr sz="800" b="1">
+                <a:solidFill>
+                  <a:srgbClr val="000000"/>
+                </a:solidFill>
+                <a:latin typeface="맑은 고딕"/>
+                <a:ea typeface="맑은 고딕"/>
+              </a:rPr>
+              <a:t>[North 2006]</a:t>
+            </a:r>
+            <a:r>
+              <a:rPr sz="800" b="0">
+                <a:solidFill>
+                  <a:srgbClr val="000000"/>
+                </a:solidFill>
+                <a:latin typeface="맑은 고딕"/>
+                <a:ea typeface="맑은 고딕"/>
+              </a:rPr>
+              <a:t>  Introducing BDD, Dan North, 2006, https://dannorth.net/blog/introducing-bdd/</a:t>
+            </a:r>
+          </a:p>
+          <a:p>
+            <a:pPr lvl="2" marL="167640" indent="-167640">
+              <a:spcBef>
+                <a:spcPts val="100"/>
+              </a:spcBef>
+              <a:spcAft>
+                <a:spcPts val="100"/>
+              </a:spcAft>
+              <a:buNone/>
+            </a:pPr>
+            <a:r>
+              <a:rPr sz="800" b="0">
+                <a:solidFill>
+                  <a:srgbClr val="000000"/>
+                </a:solidFill>
+                <a:latin typeface="맑은 고딕"/>
+                <a:ea typeface="맑은 고딕"/>
+              </a:rPr>
+              <a:t>57. </a:t>
+            </a:r>
+            <a:r>
+              <a:rPr sz="800" b="1">
+                <a:solidFill>
+                  <a:srgbClr val="000000"/>
+                </a:solidFill>
+                <a:latin typeface="맑은 고딕"/>
+                <a:ea typeface="맑은 고딕"/>
+              </a:rPr>
               <a:t>[Nygard 2011]</a:t>
             </a:r>
             <a:r>
@@ -4595,7 +4718,7 @@
                 <a:latin typeface="맑은 고딕"/>
                 <a:ea typeface="맑은 고딕"/>
               </a:rPr>
-              <a:t>55. </a:t>
+              <a:t>58. </a:t>
             </a:r>
             <a:r>
               <a:rPr sz="800" b="1">
@@ -4636,7 +4759,7 @@
                 <a:latin typeface="맑은 고딕"/>
                 <a:ea typeface="맑은 고딕"/>
               </a:rPr>
-              <a:t>56. </a:t>
+              <a:t>59. </a:t>
             </a:r>
             <a:r>
               <a:rPr sz="800" b="1">
@@ -4677,7 +4800,7 @@
                 <a:latin typeface="맑은 고딕"/>
                 <a:ea typeface="맑은 고딕"/>
               </a:rPr>
-              <a:t>57. </a:t>
+              <a:t>60. </a:t>
             </a:r>
             <a:r>
               <a:rPr sz="800" b="1">
@@ -4718,7 +4841,7 @@
                 <a:latin typeface="맑은 고딕"/>
                 <a:ea typeface="맑은 고딕"/>
               </a:rPr>
-              <a:t>58. </a:t>
+              <a:t>61. </a:t>
             </a:r>
             <a:r>
               <a:rPr sz="800" b="1">
@@ -4759,7 +4882,48 @@
                 <a:latin typeface="맑은 고딕"/>
                 <a:ea typeface="맑은 고딕"/>
               </a:rPr>
-              <a:t>59. </a:t>
+              <a:t>62. </a:t>
+            </a:r>
+            <a:r>
+              <a:rPr sz="800" b="1">
+                <a:solidFill>
+                  <a:srgbClr val="000000"/>
+                </a:solidFill>
+                <a:latin typeface="맑은 고딕"/>
+                <a:ea typeface="맑은 고딕"/>
+              </a:rPr>
+              <a:t>[Wake 2003]</a:t>
+            </a:r>
+            <a:r>
+              <a:rPr sz="800" b="0">
+                <a:solidFill>
+                  <a:srgbClr val="000000"/>
+                </a:solidFill>
+                <a:latin typeface="맑은 고딕"/>
+                <a:ea typeface="맑은 고딕"/>
+              </a:rPr>
+              <a:t>  INVEST in Good Stories, and SMART Tasks, Bill Wake, 2003, https://xp123.com/invest-in-good-stories-and-smart-tasks/</a:t>
+            </a:r>
+          </a:p>
+          <a:p>
+            <a:pPr lvl="2" marL="167640" indent="-167640">
+              <a:spcBef>
+                <a:spcPts val="100"/>
+              </a:spcBef>
+              <a:spcAft>
+                <a:spcPts val="100"/>
+              </a:spcAft>
+              <a:buNone/>
+            </a:pPr>
+            <a:r>
+              <a:rPr sz="800" b="0">
+                <a:solidFill>
+                  <a:srgbClr val="000000"/>
+                </a:solidFill>
+                <a:latin typeface="맑은 고딕"/>
+                <a:ea typeface="맑은 고딕"/>
+              </a:rPr>
+              <a:t>63. </a:t>
             </a:r>
             <a:r>
               <a:rPr sz="800" b="1">
@@ -4800,7 +4964,7 @@
                 <a:latin typeface="맑은 고딕"/>
                 <a:ea typeface="맑은 고딕"/>
               </a:rPr>
-              <a:t>60. </a:t>
+              <a:t>64. </a:t>
             </a:r>
             <a:r>
               <a:rPr sz="800" b="1">
@@ -4841,7 +5005,7 @@
                 <a:latin typeface="맑은 고딕"/>
                 <a:ea typeface="맑은 고딕"/>
               </a:rPr>
-              <a:t>61. </a:t>
+              <a:t>65. </a:t>
             </a:r>
             <a:r>
               <a:rPr sz="800" b="1">
@@ -4882,7 +5046,7 @@
                 <a:latin typeface="맑은 고딕"/>
                 <a:ea typeface="맑은 고딕"/>
               </a:rPr>
-              <a:t>62. </a:t>
+              <a:t>66. </a:t>
             </a:r>
             <a:r>
               <a:rPr sz="800" b="1">
@@ -4923,7 +5087,7 @@
                 <a:latin typeface="맑은 고딕"/>
                 <a:ea typeface="맑은 고딕"/>
               </a:rPr>
-              <a:t>63. </a:t>
+              <a:t>67. </a:t>
             </a:r>
             <a:r>
               <a:rPr sz="800" b="1">
